--- a/project_52_crowd_density_estimation/presentations/project_presentation.pptx
+++ b/project_52_crowd_density_estimation/presentations/project_presentation.pptx
@@ -13,6 +13,13 @@
     <p:sldId id="261" r:id="rId12"/>
     <p:sldId id="262" r:id="rId13"/>
     <p:sldId id="263" r:id="rId14"/>
+    <p:sldId id="264" r:id="rId15"/>
+    <p:sldId id="265" r:id="rId16"/>
+    <p:sldId id="266" r:id="rId17"/>
+    <p:sldId id="267" r:id="rId18"/>
+    <p:sldId id="268" r:id="rId19"/>
+    <p:sldId id="269" r:id="rId20"/>
+    <p:sldId id="270" r:id="rId21"/>
   </p:sldIdLst>
   <p:sldSz cx="12191695" cy="6858000" type="screen4x3"/>
   <p:notesSz cx="6858000" cy="9144000"/>
@@ -3097,23 +3104,174 @@
       <p:grpSpPr/>
       <p:sp>
         <p:nvSpPr>
-          <p:cNvPr id="2" name="Rectangle 1"/>
+          <p:cNvPr id="2" name="TextBox 1"/>
+          <p:cNvSpPr txBox="1"/>
+          <p:nvPr/>
+        </p:nvSpPr>
+        <p:spPr>
+          <a:xfrm>
+            <a:off x="914400" y="1645920"/>
+            <a:ext cx="10362895" cy="3474720"/>
+          </a:xfrm>
+          <a:prstGeom prst="rect">
+            <a:avLst/>
+          </a:prstGeom>
+          <a:noFill/>
+        </p:spPr>
+        <p:txBody>
+          <a:bodyPr wrap="square">
+            <a:spAutoFit/>
+          </a:bodyPr>
+          <a:lstStyle/>
+          <a:p>
+            <a:r>
+              <a:rPr b="1" sz="1200">
+                <a:solidFill>
+                  <a:srgbClr val="4F46E5"/>
+                </a:solidFill>
+              </a:rPr>
+              <a:t>ENGINEERING CAPSTONE PORTFOLIO • PROJECT-052</a:t>
+            </a:r>
+          </a:p>
+          <a:p>
+            <a:pPr>
+              <a:spcBef>
+                <a:spcPts val="1000"/>
+              </a:spcBef>
+            </a:pPr>
+            <a:r>
+              <a:rPr b="1" sz="3200">
+                <a:solidFill>
+                  <a:srgbClr val="0F172A"/>
+                </a:solidFill>
+              </a:rPr>
+              <a:t>AI Crowd Density Estimation &amp;
+Public Safety Anomaly Detection</a:t>
+            </a:r>
+          </a:p>
+          <a:p>
+            <a:pPr>
+              <a:spcBef>
+                <a:spcPts val="1200"/>
+              </a:spcBef>
+            </a:pPr>
+            <a:r>
+              <a:rPr sz="1400">
+                <a:solidFill>
+                  <a:srgbClr val="64748B"/>
+                </a:solidFill>
+              </a:rPr>
+              <a:t>Dual PyTorch Engines (CSRNet Dilated ConvNet &amp; Risk Regressor), 6,000 CCTV Records, SQLite WAL, SHA-256 Audit Ledger &amp; Port 5052 Microservice</a:t>
+            </a:r>
+          </a:p>
+        </p:txBody>
+      </p:sp>
+    </p:spTree>
+  </p:cSld>
+  <p:clrMapOvr>
+    <a:masterClrMapping/>
+  </p:clrMapOvr>
+</p:sld>
+</file>
+
+<file path=ppt/slides/slide10.xml><?xml version="1.0" encoding="utf-8"?>
+<p:sld xmlns:a="http://schemas.openxmlformats.org/drawingml/2006/main" xmlns:p="http://schemas.openxmlformats.org/presentationml/2006/main" xmlns:r="http://schemas.openxmlformats.org/officeDocument/2006/relationships">
+  <p:cSld>
+    <p:spTree>
+      <p:nvGrpSpPr>
+        <p:cNvPr id="1" name=""/>
+        <p:cNvGrpSpPr/>
+        <p:nvPr/>
+      </p:nvGrpSpPr>
+      <p:grpSpPr/>
+      <p:sp>
+        <p:nvSpPr>
+          <p:cNvPr id="2" name="TextBox 1"/>
+          <p:cNvSpPr txBox="1"/>
+          <p:nvPr/>
+        </p:nvSpPr>
+        <p:spPr>
+          <a:xfrm>
+            <a:off x="731520" y="365760"/>
+            <a:ext cx="10728655" cy="822960"/>
+          </a:xfrm>
+          <a:prstGeom prst="rect">
+            <a:avLst/>
+          </a:prstGeom>
+          <a:noFill/>
+        </p:spPr>
+        <p:txBody>
+          <a:bodyPr wrap="square" lIns="0" tIns="0" rIns="0" bIns="0">
+            <a:spAutoFit/>
+          </a:bodyPr>
+          <a:lstStyle/>
+          <a:p>
+            <a:r>
+              <a:rPr b="1" sz="1000">
+                <a:solidFill>
+                  <a:srgbClr val="4F46E5"/>
+                </a:solidFill>
+              </a:rPr>
+              <a:t>CASE STUDY 2 • PROJECT-052</a:t>
+            </a:r>
+          </a:p>
+          <a:p>
+            <a:r>
+              <a:rPr b="1" sz="2000">
+                <a:solidFill>
+                  <a:srgbClr val="0F172A"/>
+                </a:solidFill>
+              </a:rPr>
+              <a:t>Venue Bottleneck Case: North Gate Turnstiles</a:t>
+            </a:r>
+          </a:p>
+        </p:txBody>
+      </p:sp>
+      <p:pic>
+        <p:nvPicPr>
+          <p:cNvPr id="3" name="Picture 2" descr="04_north_gate_turnstiles_bottleneck.png"/>
+          <p:cNvPicPr>
+            <a:picLocks noChangeAspect="1"/>
+          </p:cNvPicPr>
+          <p:nvPr/>
+        </p:nvPicPr>
+        <p:blipFill>
+          <a:blip r:embed="rId2"/>
+          <a:stretch>
+            <a:fillRect/>
+          </a:stretch>
+        </p:blipFill>
+        <p:spPr>
+          <a:xfrm>
+            <a:off x="731520" y="1371600"/>
+            <a:ext cx="6858000" cy="4846320"/>
+          </a:xfrm>
+          <a:prstGeom prst="rect">
+            <a:avLst/>
+          </a:prstGeom>
+        </p:spPr>
+      </p:pic>
+      <p:sp>
+        <p:nvSpPr>
+          <p:cNvPr id="4" name="Rectangle 3"/>
           <p:cNvSpPr/>
           <p:nvPr/>
         </p:nvSpPr>
         <p:spPr>
           <a:xfrm>
-            <a:off x="0" y="0"/>
-            <a:ext cx="12191695" cy="6858000"/>
+            <a:off x="7863840" y="1371600"/>
+            <a:ext cx="3566160" cy="4846320"/>
           </a:xfrm>
           <a:prstGeom prst="rect">
             <a:avLst/>
           </a:prstGeom>
           <a:solidFill>
-            <a:srgbClr val="0F172A"/>
+            <a:srgbClr val="FFFFFF"/>
           </a:solidFill>
-          <a:ln>
-            <a:noFill/>
+          <a:ln w="12700">
+            <a:solidFill>
+              <a:srgbClr val="E2E8F0"/>
+            </a:solidFill>
           </a:ln>
         </p:spPr>
         <p:style>
@@ -3140,14 +3298,14 @@
       </p:sp>
       <p:sp>
         <p:nvSpPr>
-          <p:cNvPr id="3" name="TextBox 2"/>
+          <p:cNvPr id="5" name="TextBox 4"/>
           <p:cNvSpPr txBox="1"/>
           <p:nvPr/>
         </p:nvSpPr>
         <p:spPr>
           <a:xfrm>
-            <a:off x="1097280" y="1645920"/>
-            <a:ext cx="10058400" cy="3474720"/>
+            <a:off x="8046720" y="1554480"/>
+            <a:ext cx="3200400" cy="4480560"/>
           </a:xfrm>
           <a:prstGeom prst="rect">
             <a:avLst/>
@@ -3155,50 +3313,1694 @@
           <a:noFill/>
         </p:spPr>
         <p:txBody>
-          <a:bodyPr wrap="square">
+          <a:bodyPr wrap="square" lIns="0" tIns="0" rIns="0" bIns="0">
             <a:spAutoFit/>
           </a:bodyPr>
           <a:lstStyle/>
           <a:p>
-            <a:pPr>
-              <a:defRPr sz="1400" b="1">
-                <a:solidFill>
-                  <a:srgbClr val="38BDF8"/>
-                </a:solidFill>
-              </a:defRPr>
-            </a:pPr>
-            <a:r>
-              <a:t>PROJECT 52 OF 55  •  RESEARCH &amp; IMPLEMENTATION DECK</a:t>
-            </a:r>
-          </a:p>
-          <a:p>
-            <a:pPr>
-              <a:spcBef>
-                <a:spcPts val="1400"/>
-              </a:spcBef>
-              <a:defRPr sz="3200" b="1">
-                <a:solidFill>
-                  <a:srgbClr val="FFFFFF"/>
-                </a:solidFill>
-              </a:defRPr>
-            </a:pPr>
-            <a:r>
-              <a:t>AI-Based Crowd Density Estimation and Anomaly Detection for Public Safety</a:t>
-            </a:r>
-          </a:p>
-          <a:p>
-            <a:pPr>
-              <a:spcBef>
-                <a:spcPts val="1200"/>
-              </a:spcBef>
-              <a:defRPr sz="1600">
-                <a:solidFill>
-                  <a:srgbClr val="CBD5E1"/>
-                </a:solidFill>
-              </a:defRPr>
-            </a:pPr>
-            <a:r>
-              <a:t>Enterprise-Grade AI Architecture, Machine Learning Pipeline &amp; Deployment Framework</a:t>
+            <a:r>
+              <a:rPr b="1" sz="1300">
+                <a:solidFill>
+                  <a:srgbClr val="4F46E5"/>
+                </a:solidFill>
+              </a:rPr>
+              <a:t>Turnstile Pinch Point</a:t>
+            </a:r>
+          </a:p>
+          <a:p>
+            <a:pPr>
+              <a:spcBef>
+                <a:spcPts val="400"/>
+              </a:spcBef>
+            </a:pPr>
+            <a:r>
+              <a:rPr sz="1000">
+                <a:solidFill>
+                  <a:srgbClr val="1E293B"/>
+                </a:solidFill>
+              </a:rPr>
+              <a:t>• Zone: North Gate Turnstiles (Venue Bottleneck archetype).</a:t>
+            </a:r>
+          </a:p>
+          <a:p>
+            <a:pPr>
+              <a:spcBef>
+                <a:spcPts val="400"/>
+              </a:spcBef>
+            </a:pPr>
+            <a:r>
+              <a:rPr sz="1000">
+                <a:solidFill>
+                  <a:srgbClr val="1E293B"/>
+                </a:solidFill>
+              </a:rPr>
+              <a:t>• Capacity ratio exceeds 88% with high bottleneck pressure.</a:t>
+            </a:r>
+          </a:p>
+          <a:p>
+            <a:pPr>
+              <a:spcBef>
+                <a:spcPts val="400"/>
+              </a:spcBef>
+            </a:pPr>
+            <a:r>
+              <a:rPr sz="1000">
+                <a:solidFill>
+                  <a:srgbClr val="1E293B"/>
+                </a:solidFill>
+              </a:rPr>
+              <a:t>• Risk Score: 0.85; Optical Turbulence: 0.79.</a:t>
+            </a:r>
+          </a:p>
+          <a:p>
+            <a:pPr>
+              <a:spcBef>
+                <a:spcPts val="400"/>
+              </a:spcBef>
+            </a:pPr>
+            <a:r>
+              <a:rPr sz="1000">
+                <a:solidFill>
+                  <a:srgbClr val="1E293B"/>
+                </a:solidFill>
+              </a:rPr>
+              <a:t>• Anomaly classified: Dangerous Congestion at turnstile entry queue.</a:t>
+            </a:r>
+          </a:p>
+          <a:p>
+            <a:pPr>
+              <a:spcBef>
+                <a:spcPts val="400"/>
+              </a:spcBef>
+            </a:pPr>
+            <a:r>
+              <a:rPr sz="1000">
+                <a:solidFill>
+                  <a:srgbClr val="1E293B"/>
+                </a:solidFill>
+              </a:rPr>
+              <a:t>• Directs automated turnstile speed modulation.</a:t>
+            </a:r>
+          </a:p>
+        </p:txBody>
+      </p:sp>
+    </p:spTree>
+  </p:cSld>
+  <p:clrMapOvr>
+    <a:masterClrMapping/>
+  </p:clrMapOvr>
+</p:sld>
+</file>
+
+<file path=ppt/slides/slide11.xml><?xml version="1.0" encoding="utf-8"?>
+<p:sld xmlns:a="http://schemas.openxmlformats.org/drawingml/2006/main" xmlns:p="http://schemas.openxmlformats.org/presentationml/2006/main" xmlns:r="http://schemas.openxmlformats.org/officeDocument/2006/relationships">
+  <p:cSld>
+    <p:spTree>
+      <p:nvGrpSpPr>
+        <p:cNvPr id="1" name=""/>
+        <p:cNvGrpSpPr/>
+        <p:nvPr/>
+      </p:nvGrpSpPr>
+      <p:grpSpPr/>
+      <p:sp>
+        <p:nvSpPr>
+          <p:cNvPr id="2" name="TextBox 1"/>
+          <p:cNvSpPr txBox="1"/>
+          <p:nvPr/>
+        </p:nvSpPr>
+        <p:spPr>
+          <a:xfrm>
+            <a:off x="731520" y="365760"/>
+            <a:ext cx="10728655" cy="822960"/>
+          </a:xfrm>
+          <a:prstGeom prst="rect">
+            <a:avLst/>
+          </a:prstGeom>
+          <a:noFill/>
+        </p:spPr>
+        <p:txBody>
+          <a:bodyPr wrap="square" lIns="0" tIns="0" rIns="0" bIns="0">
+            <a:spAutoFit/>
+          </a:bodyPr>
+          <a:lstStyle/>
+          <a:p>
+            <a:r>
+              <a:rPr b="1" sz="1000">
+                <a:solidFill>
+                  <a:srgbClr val="4F46E5"/>
+                </a:solidFill>
+              </a:rPr>
+              <a:t>CASE STUDY 3 • PROJECT-052</a:t>
+            </a:r>
+          </a:p>
+          <a:p>
+            <a:r>
+              <a:rPr b="1" sz="2000">
+                <a:solidFill>
+                  <a:srgbClr val="0F172A"/>
+                </a:solidFill>
+              </a:rPr>
+              <a:t>Transit Platform Case: Station Platform 2 Monitoring</a:t>
+            </a:r>
+          </a:p>
+        </p:txBody>
+      </p:sp>
+      <p:pic>
+        <p:nvPicPr>
+          <p:cNvPr id="3" name="Picture 2" descr="05_transit_station_platform_monitoring.png"/>
+          <p:cNvPicPr>
+            <a:picLocks noChangeAspect="1"/>
+          </p:cNvPicPr>
+          <p:nvPr/>
+        </p:nvPicPr>
+        <p:blipFill>
+          <a:blip r:embed="rId2"/>
+          <a:stretch>
+            <a:fillRect/>
+          </a:stretch>
+        </p:blipFill>
+        <p:spPr>
+          <a:xfrm>
+            <a:off x="731520" y="1371600"/>
+            <a:ext cx="6858000" cy="4846320"/>
+          </a:xfrm>
+          <a:prstGeom prst="rect">
+            <a:avLst/>
+          </a:prstGeom>
+        </p:spPr>
+      </p:pic>
+      <p:sp>
+        <p:nvSpPr>
+          <p:cNvPr id="4" name="Rectangle 3"/>
+          <p:cNvSpPr/>
+          <p:nvPr/>
+        </p:nvSpPr>
+        <p:spPr>
+          <a:xfrm>
+            <a:off x="7863840" y="1371600"/>
+            <a:ext cx="3566160" cy="4846320"/>
+          </a:xfrm>
+          <a:prstGeom prst="rect">
+            <a:avLst/>
+          </a:prstGeom>
+          <a:solidFill>
+            <a:srgbClr val="FFFFFF"/>
+          </a:solidFill>
+          <a:ln w="12700">
+            <a:solidFill>
+              <a:srgbClr val="E2E8F0"/>
+            </a:solidFill>
+          </a:ln>
+        </p:spPr>
+        <p:style>
+          <a:lnRef idx="1">
+            <a:schemeClr val="accent1"/>
+          </a:lnRef>
+          <a:fillRef idx="3">
+            <a:schemeClr val="accent1"/>
+          </a:fillRef>
+          <a:effectRef idx="2">
+            <a:schemeClr val="accent1"/>
+          </a:effectRef>
+          <a:fontRef idx="minor">
+            <a:schemeClr val="lt1"/>
+          </a:fontRef>
+        </p:style>
+        <p:txBody>
+          <a:bodyPr rtlCol="0" anchor="ctr"/>
+          <a:lstStyle/>
+          <a:p>
+            <a:pPr algn="ctr"/>
+          </a:p>
+        </p:txBody>
+      </p:sp>
+      <p:sp>
+        <p:nvSpPr>
+          <p:cNvPr id="5" name="TextBox 4"/>
+          <p:cNvSpPr txBox="1"/>
+          <p:nvPr/>
+        </p:nvSpPr>
+        <p:spPr>
+          <a:xfrm>
+            <a:off x="8046720" y="1554480"/>
+            <a:ext cx="3200400" cy="4480560"/>
+          </a:xfrm>
+          <a:prstGeom prst="rect">
+            <a:avLst/>
+          </a:prstGeom>
+          <a:noFill/>
+        </p:spPr>
+        <p:txBody>
+          <a:bodyPr wrap="square" lIns="0" tIns="0" rIns="0" bIns="0">
+            <a:spAutoFit/>
+          </a:bodyPr>
+          <a:lstStyle/>
+          <a:p>
+            <a:r>
+              <a:rPr b="1" sz="1300">
+                <a:solidFill>
+                  <a:srgbClr val="4F46E5"/>
+                </a:solidFill>
+              </a:rPr>
+              <a:t>Platform Safety</a:t>
+            </a:r>
+          </a:p>
+          <a:p>
+            <a:pPr>
+              <a:spcBef>
+                <a:spcPts val="400"/>
+              </a:spcBef>
+            </a:pPr>
+            <a:r>
+              <a:rPr sz="1000">
+                <a:solidFill>
+                  <a:srgbClr val="1E293B"/>
+                </a:solidFill>
+              </a:rPr>
+              <a:t>• Zone: Transit Station Platform 2 (Transit Platform archetype).</a:t>
+            </a:r>
+          </a:p>
+          <a:p>
+            <a:pPr>
+              <a:spcBef>
+                <a:spcPts val="400"/>
+              </a:spcBef>
+            </a:pPr>
+            <a:r>
+              <a:rPr sz="1000">
+                <a:solidFill>
+                  <a:srgbClr val="1E293B"/>
+                </a:solidFill>
+              </a:rPr>
+              <a:t>• Estimated Density: 215 persons (Moderate operational transit).</a:t>
+            </a:r>
+          </a:p>
+          <a:p>
+            <a:pPr>
+              <a:spcBef>
+                <a:spcPts val="400"/>
+              </a:spcBef>
+            </a:pPr>
+            <a:r>
+              <a:rPr sz="1000">
+                <a:solidFill>
+                  <a:srgbClr val="1E293B"/>
+                </a:solidFill>
+              </a:rPr>
+              <a:t>• Risk Score: 0.44; Optical Turbulence: 0.41.</a:t>
+            </a:r>
+          </a:p>
+          <a:p>
+            <a:pPr>
+              <a:spcBef>
+                <a:spcPts val="400"/>
+              </a:spcBef>
+            </a:pPr>
+            <a:r>
+              <a:rPr sz="1000">
+                <a:solidFill>
+                  <a:srgbClr val="1E293B"/>
+                </a:solidFill>
+              </a:rPr>
+              <a:t>• Status Normal: Stable crowd dynamics.</a:t>
+            </a:r>
+          </a:p>
+          <a:p>
+            <a:pPr>
+              <a:spcBef>
+                <a:spcPts val="400"/>
+              </a:spcBef>
+            </a:pPr>
+            <a:r>
+              <a:rPr sz="1000">
+                <a:solidFill>
+                  <a:srgbClr val="1E293B"/>
+                </a:solidFill>
+              </a:rPr>
+              <a:t>• Directive: Standard perimeter monitoring active.</a:t>
+            </a:r>
+          </a:p>
+        </p:txBody>
+      </p:sp>
+    </p:spTree>
+  </p:cSld>
+  <p:clrMapOvr>
+    <a:masterClrMapping/>
+  </p:clrMapOvr>
+</p:sld>
+</file>
+
+<file path=ppt/slides/slide12.xml><?xml version="1.0" encoding="utf-8"?>
+<p:sld xmlns:a="http://schemas.openxmlformats.org/drawingml/2006/main" xmlns:p="http://schemas.openxmlformats.org/presentationml/2006/main" xmlns:r="http://schemas.openxmlformats.org/officeDocument/2006/relationships">
+  <p:cSld>
+    <p:spTree>
+      <p:nvGrpSpPr>
+        <p:cNvPr id="1" name=""/>
+        <p:cNvGrpSpPr/>
+        <p:nvPr/>
+      </p:nvGrpSpPr>
+      <p:grpSpPr/>
+      <p:sp>
+        <p:nvSpPr>
+          <p:cNvPr id="2" name="TextBox 1"/>
+          <p:cNvSpPr txBox="1"/>
+          <p:nvPr/>
+        </p:nvSpPr>
+        <p:spPr>
+          <a:xfrm>
+            <a:off x="731520" y="365760"/>
+            <a:ext cx="10728655" cy="822960"/>
+          </a:xfrm>
+          <a:prstGeom prst="rect">
+            <a:avLst/>
+          </a:prstGeom>
+          <a:noFill/>
+        </p:spPr>
+        <p:txBody>
+          <a:bodyPr wrap="square" lIns="0" tIns="0" rIns="0" bIns="0">
+            <a:spAutoFit/>
+          </a:bodyPr>
+          <a:lstStyle/>
+          <a:p>
+            <a:r>
+              <a:rPr b="1" sz="1000">
+                <a:solidFill>
+                  <a:srgbClr val="4F46E5"/>
+                </a:solidFill>
+              </a:rPr>
+              <a:t>CASE STUDY 4 • PROJECT-052</a:t>
+            </a:r>
+          </a:p>
+          <a:p>
+            <a:r>
+              <a:rPr b="1" sz="2000">
+                <a:solidFill>
+                  <a:srgbClr val="0F172A"/>
+                </a:solidFill>
+              </a:rPr>
+              <a:t>Emergency Egress Case: Stadium Exit Corridor</a:t>
+            </a:r>
+          </a:p>
+        </p:txBody>
+      </p:sp>
+      <p:pic>
+        <p:nvPicPr>
+          <p:cNvPr id="3" name="Picture 2" descr="06_stadium_emergency_exit_corridor.png"/>
+          <p:cNvPicPr>
+            <a:picLocks noChangeAspect="1"/>
+          </p:cNvPicPr>
+          <p:nvPr/>
+        </p:nvPicPr>
+        <p:blipFill>
+          <a:blip r:embed="rId2"/>
+          <a:stretch>
+            <a:fillRect/>
+          </a:stretch>
+        </p:blipFill>
+        <p:spPr>
+          <a:xfrm>
+            <a:off x="731520" y="1371600"/>
+            <a:ext cx="6858000" cy="4846320"/>
+          </a:xfrm>
+          <a:prstGeom prst="rect">
+            <a:avLst/>
+          </a:prstGeom>
+        </p:spPr>
+      </p:pic>
+      <p:sp>
+        <p:nvSpPr>
+          <p:cNvPr id="4" name="Rectangle 3"/>
+          <p:cNvSpPr/>
+          <p:nvPr/>
+        </p:nvSpPr>
+        <p:spPr>
+          <a:xfrm>
+            <a:off x="7863840" y="1371600"/>
+            <a:ext cx="3566160" cy="4846320"/>
+          </a:xfrm>
+          <a:prstGeom prst="rect">
+            <a:avLst/>
+          </a:prstGeom>
+          <a:solidFill>
+            <a:srgbClr val="FFFFFF"/>
+          </a:solidFill>
+          <a:ln w="12700">
+            <a:solidFill>
+              <a:srgbClr val="E2E8F0"/>
+            </a:solidFill>
+          </a:ln>
+        </p:spPr>
+        <p:style>
+          <a:lnRef idx="1">
+            <a:schemeClr val="accent1"/>
+          </a:lnRef>
+          <a:fillRef idx="3">
+            <a:schemeClr val="accent1"/>
+          </a:fillRef>
+          <a:effectRef idx="2">
+            <a:schemeClr val="accent1"/>
+          </a:effectRef>
+          <a:fontRef idx="minor">
+            <a:schemeClr val="lt1"/>
+          </a:fontRef>
+        </p:style>
+        <p:txBody>
+          <a:bodyPr rtlCol="0" anchor="ctr"/>
+          <a:lstStyle/>
+          <a:p>
+            <a:pPr algn="ctr"/>
+          </a:p>
+        </p:txBody>
+      </p:sp>
+      <p:sp>
+        <p:nvSpPr>
+          <p:cNvPr id="5" name="TextBox 4"/>
+          <p:cNvSpPr txBox="1"/>
+          <p:nvPr/>
+        </p:nvSpPr>
+        <p:spPr>
+          <a:xfrm>
+            <a:off x="8046720" y="1554480"/>
+            <a:ext cx="3200400" cy="4480560"/>
+          </a:xfrm>
+          <a:prstGeom prst="rect">
+            <a:avLst/>
+          </a:prstGeom>
+          <a:noFill/>
+        </p:spPr>
+        <p:txBody>
+          <a:bodyPr wrap="square" lIns="0" tIns="0" rIns="0" bIns="0">
+            <a:spAutoFit/>
+          </a:bodyPr>
+          <a:lstStyle/>
+          <a:p>
+            <a:r>
+              <a:rPr b="1" sz="1300">
+                <a:solidFill>
+                  <a:srgbClr val="4F46E5"/>
+                </a:solidFill>
+              </a:rPr>
+              <a:t>Stampede Surge Defense</a:t>
+            </a:r>
+          </a:p>
+          <a:p>
+            <a:pPr>
+              <a:spcBef>
+                <a:spcPts val="400"/>
+              </a:spcBef>
+            </a:pPr>
+            <a:r>
+              <a:rPr sz="1000">
+                <a:solidFill>
+                  <a:srgbClr val="1E293B"/>
+                </a:solidFill>
+              </a:rPr>
+              <a:t>• Zone: Stadium Emergency Exit Corridor (Emergency Egress archetype).</a:t>
+            </a:r>
+          </a:p>
+          <a:p>
+            <a:pPr>
+              <a:spcBef>
+                <a:spcPts val="400"/>
+              </a:spcBef>
+            </a:pPr>
+            <a:r>
+              <a:rPr sz="1000">
+                <a:solidFill>
+                  <a:srgbClr val="1E293B"/>
+                </a:solidFill>
+              </a:rPr>
+              <a:t>• High influx scenario triggers Stampede Surge interlock.</a:t>
+            </a:r>
+          </a:p>
+          <a:p>
+            <a:pPr>
+              <a:spcBef>
+                <a:spcPts val="400"/>
+              </a:spcBef>
+            </a:pPr>
+            <a:r>
+              <a:rPr sz="1000">
+                <a:solidFill>
+                  <a:srgbClr val="1E293B"/>
+                </a:solidFill>
+              </a:rPr>
+              <a:t>• Risk Score: 0.94; Optical Turbulence: 0.89.</a:t>
+            </a:r>
+          </a:p>
+          <a:p>
+            <a:pPr>
+              <a:spcBef>
+                <a:spcPts val="400"/>
+              </a:spcBef>
+            </a:pPr>
+            <a:r>
+              <a:rPr sz="1000">
+                <a:solidFill>
+                  <a:srgbClr val="1E293B"/>
+                </a:solidFill>
+              </a:rPr>
+              <a:t>• Directive: ACTIVATE EMERGENCY CONCOURSE DRAIN: Broadcast audio egress routes.</a:t>
+            </a:r>
+          </a:p>
+          <a:p>
+            <a:pPr>
+              <a:spcBef>
+                <a:spcPts val="400"/>
+              </a:spcBef>
+            </a:pPr>
+            <a:r>
+              <a:rPr sz="1000">
+                <a:solidFill>
+                  <a:srgbClr val="1E293B"/>
+                </a:solidFill>
+              </a:rPr>
+              <a:t>• Instant escalation to venue safety command center.</a:t>
+            </a:r>
+          </a:p>
+        </p:txBody>
+      </p:sp>
+    </p:spTree>
+  </p:cSld>
+  <p:clrMapOvr>
+    <a:masterClrMapping/>
+  </p:clrMapOvr>
+</p:sld>
+</file>
+
+<file path=ppt/slides/slide13.xml><?xml version="1.0" encoding="utf-8"?>
+<p:sld xmlns:a="http://schemas.openxmlformats.org/drawingml/2006/main" xmlns:p="http://schemas.openxmlformats.org/presentationml/2006/main" xmlns:r="http://schemas.openxmlformats.org/officeDocument/2006/relationships">
+  <p:cSld>
+    <p:spTree>
+      <p:nvGrpSpPr>
+        <p:cNvPr id="1" name=""/>
+        <p:cNvGrpSpPr/>
+        <p:nvPr/>
+      </p:nvGrpSpPr>
+      <p:grpSpPr/>
+      <p:sp>
+        <p:nvSpPr>
+          <p:cNvPr id="2" name="TextBox 1"/>
+          <p:cNvSpPr txBox="1"/>
+          <p:nvPr/>
+        </p:nvSpPr>
+        <p:spPr>
+          <a:xfrm>
+            <a:off x="731520" y="365760"/>
+            <a:ext cx="10728655" cy="822960"/>
+          </a:xfrm>
+          <a:prstGeom prst="rect">
+            <a:avLst/>
+          </a:prstGeom>
+          <a:noFill/>
+        </p:spPr>
+        <p:txBody>
+          <a:bodyPr wrap="square" lIns="0" tIns="0" rIns="0" bIns="0">
+            <a:spAutoFit/>
+          </a:bodyPr>
+          <a:lstStyle/>
+          <a:p>
+            <a:r>
+              <a:rPr b="1" sz="1000">
+                <a:solidFill>
+                  <a:srgbClr val="4F46E5"/>
+                </a:solidFill>
+              </a:rPr>
+              <a:t>SECURITY &amp; AUDIT • PROJECT-052</a:t>
+            </a:r>
+          </a:p>
+          <a:p>
+            <a:r>
+              <a:rPr b="1" sz="2000">
+                <a:solidFill>
+                  <a:srgbClr val="0F172A"/>
+                </a:solidFill>
+              </a:rPr>
+              <a:t>Cryptographic Audit Ledger &amp; Continuous Hash Chain</a:t>
+            </a:r>
+          </a:p>
+        </p:txBody>
+      </p:sp>
+      <p:pic>
+        <p:nvPicPr>
+          <p:cNvPr id="3" name="Picture 2" descr="08_cryptographic_audit_ledger.png"/>
+          <p:cNvPicPr>
+            <a:picLocks noChangeAspect="1"/>
+          </p:cNvPicPr>
+          <p:nvPr/>
+        </p:nvPicPr>
+        <p:blipFill>
+          <a:blip r:embed="rId2"/>
+          <a:stretch>
+            <a:fillRect/>
+          </a:stretch>
+        </p:blipFill>
+        <p:spPr>
+          <a:xfrm>
+            <a:off x="731520" y="1371600"/>
+            <a:ext cx="6858000" cy="4846320"/>
+          </a:xfrm>
+          <a:prstGeom prst="rect">
+            <a:avLst/>
+          </a:prstGeom>
+        </p:spPr>
+      </p:pic>
+      <p:sp>
+        <p:nvSpPr>
+          <p:cNvPr id="4" name="Rectangle 3"/>
+          <p:cNvSpPr/>
+          <p:nvPr/>
+        </p:nvSpPr>
+        <p:spPr>
+          <a:xfrm>
+            <a:off x="7863840" y="1371600"/>
+            <a:ext cx="3566160" cy="4846320"/>
+          </a:xfrm>
+          <a:prstGeom prst="rect">
+            <a:avLst/>
+          </a:prstGeom>
+          <a:solidFill>
+            <a:srgbClr val="FFFFFF"/>
+          </a:solidFill>
+          <a:ln w="12700">
+            <a:solidFill>
+              <a:srgbClr val="E2E8F0"/>
+            </a:solidFill>
+          </a:ln>
+        </p:spPr>
+        <p:style>
+          <a:lnRef idx="1">
+            <a:schemeClr val="accent1"/>
+          </a:lnRef>
+          <a:fillRef idx="3">
+            <a:schemeClr val="accent1"/>
+          </a:fillRef>
+          <a:effectRef idx="2">
+            <a:schemeClr val="accent1"/>
+          </a:effectRef>
+          <a:fontRef idx="minor">
+            <a:schemeClr val="lt1"/>
+          </a:fontRef>
+        </p:style>
+        <p:txBody>
+          <a:bodyPr rtlCol="0" anchor="ctr"/>
+          <a:lstStyle/>
+          <a:p>
+            <a:pPr algn="ctr"/>
+          </a:p>
+        </p:txBody>
+      </p:sp>
+      <p:sp>
+        <p:nvSpPr>
+          <p:cNvPr id="5" name="TextBox 4"/>
+          <p:cNvSpPr txBox="1"/>
+          <p:nvPr/>
+        </p:nvSpPr>
+        <p:spPr>
+          <a:xfrm>
+            <a:off x="8046720" y="1554480"/>
+            <a:ext cx="3200400" cy="4480560"/>
+          </a:xfrm>
+          <a:prstGeom prst="rect">
+            <a:avLst/>
+          </a:prstGeom>
+          <a:noFill/>
+        </p:spPr>
+        <p:txBody>
+          <a:bodyPr wrap="square" lIns="0" tIns="0" rIns="0" bIns="0">
+            <a:spAutoFit/>
+          </a:bodyPr>
+          <a:lstStyle/>
+          <a:p>
+            <a:r>
+              <a:rPr b="1" sz="1300">
+                <a:solidFill>
+                  <a:srgbClr val="4F46E5"/>
+                </a:solidFill>
+              </a:rPr>
+              <a:t>Zero-Trust Provenance</a:t>
+            </a:r>
+          </a:p>
+          <a:p>
+            <a:pPr>
+              <a:spcBef>
+                <a:spcPts val="400"/>
+              </a:spcBef>
+            </a:pPr>
+            <a:r>
+              <a:rPr sz="1000">
+                <a:solidFill>
+                  <a:srgbClr val="1E293B"/>
+                </a:solidFill>
+              </a:rPr>
+              <a:t>• Seeded with Genesis Block #0 (64-character deterministic zero-hash).</a:t>
+            </a:r>
+          </a:p>
+          <a:p>
+            <a:pPr>
+              <a:spcBef>
+                <a:spcPts val="400"/>
+              </a:spcBef>
+            </a:pPr>
+            <a:r>
+              <a:rPr sz="1000">
+                <a:solidFill>
+                  <a:srgbClr val="1E293B"/>
+                </a:solidFill>
+              </a:rPr>
+              <a:t>• Continuous block chaining: Block N incorporates hash of Block N-1.</a:t>
+            </a:r>
+          </a:p>
+          <a:p>
+            <a:pPr>
+              <a:spcBef>
+                <a:spcPts val="400"/>
+              </a:spcBef>
+            </a:pPr>
+            <a:r>
+              <a:rPr sz="1000">
+                <a:solidFill>
+                  <a:srgbClr val="1E293B"/>
+                </a:solidFill>
+              </a:rPr>
+              <a:t>• Audit events: GENESIS_BLOCK, CROWD_MONITORING_SCAN, CROWD_ANOMALY_ALERT.</a:t>
+            </a:r>
+          </a:p>
+          <a:p>
+            <a:pPr>
+              <a:spcBef>
+                <a:spcPts val="400"/>
+              </a:spcBef>
+            </a:pPr>
+            <a:r>
+              <a:rPr sz="1000">
+                <a:solidFill>
+                  <a:srgbClr val="1E293B"/>
+                </a:solidFill>
+              </a:rPr>
+              <a:t>• 100% verified cryptographic chain integrity.</a:t>
+            </a:r>
+          </a:p>
+          <a:p>
+            <a:pPr>
+              <a:spcBef>
+                <a:spcPts val="400"/>
+              </a:spcBef>
+            </a:pPr>
+            <a:r>
+              <a:rPr sz="1000">
+                <a:solidFill>
+                  <a:srgbClr val="1E293B"/>
+                </a:solidFill>
+              </a:rPr>
+              <a:t>• Tamper-proof compliance with municipal public venue safety ordinances.</a:t>
+            </a:r>
+          </a:p>
+        </p:txBody>
+      </p:sp>
+    </p:spTree>
+  </p:cSld>
+  <p:clrMapOvr>
+    <a:masterClrMapping/>
+  </p:clrMapOvr>
+</p:sld>
+</file>
+
+<file path=ppt/slides/slide14.xml><?xml version="1.0" encoding="utf-8"?>
+<p:sld xmlns:a="http://schemas.openxmlformats.org/drawingml/2006/main" xmlns:p="http://schemas.openxmlformats.org/presentationml/2006/main" xmlns:r="http://schemas.openxmlformats.org/officeDocument/2006/relationships">
+  <p:cSld>
+    <p:spTree>
+      <p:nvGrpSpPr>
+        <p:cNvPr id="1" name=""/>
+        <p:cNvGrpSpPr/>
+        <p:nvPr/>
+      </p:nvGrpSpPr>
+      <p:grpSpPr/>
+      <p:sp>
+        <p:nvSpPr>
+          <p:cNvPr id="2" name="TextBox 1"/>
+          <p:cNvSpPr txBox="1"/>
+          <p:nvPr/>
+        </p:nvSpPr>
+        <p:spPr>
+          <a:xfrm>
+            <a:off x="731520" y="365760"/>
+            <a:ext cx="10728655" cy="822960"/>
+          </a:xfrm>
+          <a:prstGeom prst="rect">
+            <a:avLst/>
+          </a:prstGeom>
+          <a:noFill/>
+        </p:spPr>
+        <p:txBody>
+          <a:bodyPr wrap="square" lIns="0" tIns="0" rIns="0" bIns="0">
+            <a:spAutoFit/>
+          </a:bodyPr>
+          <a:lstStyle/>
+          <a:p>
+            <a:r>
+              <a:rPr b="1" sz="1000">
+                <a:solidFill>
+                  <a:srgbClr val="4F46E5"/>
+                </a:solidFill>
+              </a:rPr>
+              <a:t>QUALITY ASSURANCE • PROJECT-052</a:t>
+            </a:r>
+          </a:p>
+          <a:p>
+            <a:r>
+              <a:rPr b="1" sz="2000">
+                <a:solidFill>
+                  <a:srgbClr val="0F172A"/>
+                </a:solidFill>
+              </a:rPr>
+              <a:t>Automated QA Verification: 100% Pass Rate</a:t>
+            </a:r>
+          </a:p>
+        </p:txBody>
+      </p:sp>
+      <p:sp>
+        <p:nvSpPr>
+          <p:cNvPr id="3" name="Rectangle 2"/>
+          <p:cNvSpPr/>
+          <p:nvPr/>
+        </p:nvSpPr>
+        <p:spPr>
+          <a:xfrm>
+            <a:off x="731520" y="1371600"/>
+            <a:ext cx="5120640" cy="4846320"/>
+          </a:xfrm>
+          <a:prstGeom prst="rect">
+            <a:avLst/>
+          </a:prstGeom>
+          <a:solidFill>
+            <a:srgbClr val="FFFFFF"/>
+          </a:solidFill>
+          <a:ln w="12700">
+            <a:solidFill>
+              <a:srgbClr val="E2E8F0"/>
+            </a:solidFill>
+          </a:ln>
+        </p:spPr>
+        <p:style>
+          <a:lnRef idx="1">
+            <a:schemeClr val="accent1"/>
+          </a:lnRef>
+          <a:fillRef idx="3">
+            <a:schemeClr val="accent1"/>
+          </a:fillRef>
+          <a:effectRef idx="2">
+            <a:schemeClr val="accent1"/>
+          </a:effectRef>
+          <a:fontRef idx="minor">
+            <a:schemeClr val="lt1"/>
+          </a:fontRef>
+        </p:style>
+        <p:txBody>
+          <a:bodyPr rtlCol="0" anchor="ctr"/>
+          <a:lstStyle/>
+          <a:p>
+            <a:pPr algn="ctr"/>
+          </a:p>
+        </p:txBody>
+      </p:sp>
+      <p:sp>
+        <p:nvSpPr>
+          <p:cNvPr id="4" name="TextBox 3"/>
+          <p:cNvSpPr txBox="1"/>
+          <p:nvPr/>
+        </p:nvSpPr>
+        <p:spPr>
+          <a:xfrm>
+            <a:off x="914400" y="1554480"/>
+            <a:ext cx="4754880" cy="4480560"/>
+          </a:xfrm>
+          <a:prstGeom prst="rect">
+            <a:avLst/>
+          </a:prstGeom>
+          <a:noFill/>
+        </p:spPr>
+        <p:txBody>
+          <a:bodyPr wrap="square" lIns="0" tIns="0" rIns="0" bIns="0">
+            <a:spAutoFit/>
+          </a:bodyPr>
+          <a:lstStyle/>
+          <a:p>
+            <a:r>
+              <a:rPr b="1" sz="1300">
+                <a:solidFill>
+                  <a:srgbClr val="4F46E5"/>
+                </a:solidFill>
+              </a:rPr>
+              <a:t>Test Suite Breakdown (31 Passing Tests)</a:t>
+            </a:r>
+          </a:p>
+          <a:p>
+            <a:pPr>
+              <a:spcBef>
+                <a:spcPts val="400"/>
+              </a:spcBef>
+            </a:pPr>
+            <a:r>
+              <a:rPr sz="1000">
+                <a:solidFill>
+                  <a:srgbClr val="1E293B"/>
+                </a:solidFill>
+              </a:rPr>
+              <a:t>• 1. Deliverables Verification: requirements.txt, .env.example, scripts (8 tests).</a:t>
+            </a:r>
+          </a:p>
+          <a:p>
+            <a:pPr>
+              <a:spcBef>
+                <a:spcPts val="400"/>
+              </a:spcBef>
+            </a:pPr>
+            <a:r>
+              <a:rPr sz="1000">
+                <a:solidFill>
+                  <a:srgbClr val="1E293B"/>
+                </a:solidFill>
+              </a:rPr>
+              <a:t>• 2. Health &amp; Gateway: Port 5052, SQLite WAL mode, dual model parameters (2 tests).</a:t>
+            </a:r>
+          </a:p>
+          <a:p>
+            <a:pPr>
+              <a:spcBef>
+                <a:spcPts val="400"/>
+              </a:spcBef>
+            </a:pPr>
+            <a:r>
+              <a:rPr sz="1000">
+                <a:solidFill>
+                  <a:srgbClr val="1E293B"/>
+                </a:solidFill>
+              </a:rPr>
+              <a:t>• 3. Analytics &amp; Aggregations: 6,000 records, alert count, mean crowd (2 tests).</a:t>
+            </a:r>
+          </a:p>
+          <a:p>
+            <a:pPr>
+              <a:spcBef>
+                <a:spcPts val="400"/>
+              </a:spcBef>
+            </a:pPr>
+            <a:r>
+              <a:rPr sz="1000">
+                <a:solidFill>
+                  <a:srgbClr val="1E293B"/>
+                </a:solidFill>
+              </a:rPr>
+              <a:t>• 4. Presets &amp; Pagination: 4 zone presets, pagination, zone filters (3 tests).</a:t>
+            </a:r>
+          </a:p>
+          <a:p>
+            <a:pPr>
+              <a:spcBef>
+                <a:spcPts val="400"/>
+              </a:spcBef>
+            </a:pPr>
+            <a:r>
+              <a:rPr sz="1000">
+                <a:solidFill>
+                  <a:srgbClr val="1E293B"/>
+                </a:solidFill>
+              </a:rPr>
+              <a:t>• 5. Scene Analysis &amp; Anomaly: Central Plaza surge, turnstiles, exit corridor (3 tests).</a:t>
+            </a:r>
+          </a:p>
+          <a:p>
+            <a:pPr>
+              <a:spcBef>
+                <a:spcPts val="400"/>
+              </a:spcBef>
+            </a:pPr>
+            <a:r>
+              <a:rPr sz="1000">
+                <a:solidFill>
+                  <a:srgbClr val="1E293B"/>
+                </a:solidFill>
+              </a:rPr>
+              <a:t>• 6. Cryptographic Audit: Genesis Block #0, continuous hash chaining (3 tests).</a:t>
+            </a:r>
+          </a:p>
+          <a:p>
+            <a:pPr>
+              <a:spcBef>
+                <a:spcPts val="400"/>
+              </a:spcBef>
+            </a:pPr>
+            <a:r>
+              <a:rPr sz="1000">
+                <a:solidFill>
+                  <a:srgbClr val="1E293B"/>
+                </a:solidFill>
+              </a:rPr>
+              <a:t>• 7. PyTorch Model Units: CSRNet forward pass shape, risk regressor units (5 tests).</a:t>
+            </a:r>
+          </a:p>
+          <a:p>
+            <a:pPr>
+              <a:spcBef>
+                <a:spcPts val="400"/>
+              </a:spcBef>
+            </a:pPr>
+            <a:r>
+              <a:rPr sz="1000">
+                <a:solidFill>
+                  <a:srgbClr val="1E293B"/>
+                </a:solidFill>
+              </a:rPr>
+              <a:t>• 8. Database &amp; Web: WAL pragma, zero null hashes, HTML &amp; heatmap serving (5 tests).</a:t>
+            </a:r>
+          </a:p>
+        </p:txBody>
+      </p:sp>
+      <p:sp>
+        <p:nvSpPr>
+          <p:cNvPr id="5" name="Rectangle 4"/>
+          <p:cNvSpPr/>
+          <p:nvPr/>
+        </p:nvSpPr>
+        <p:spPr>
+          <a:xfrm>
+            <a:off x="6217920" y="1371600"/>
+            <a:ext cx="5120640" cy="4846320"/>
+          </a:xfrm>
+          <a:prstGeom prst="rect">
+            <a:avLst/>
+          </a:prstGeom>
+          <a:solidFill>
+            <a:srgbClr val="FFFFFF"/>
+          </a:solidFill>
+          <a:ln w="12700">
+            <a:solidFill>
+              <a:srgbClr val="E2E8F0"/>
+            </a:solidFill>
+          </a:ln>
+        </p:spPr>
+        <p:style>
+          <a:lnRef idx="1">
+            <a:schemeClr val="accent1"/>
+          </a:lnRef>
+          <a:fillRef idx="3">
+            <a:schemeClr val="accent1"/>
+          </a:fillRef>
+          <a:effectRef idx="2">
+            <a:schemeClr val="accent1"/>
+          </a:effectRef>
+          <a:fontRef idx="minor">
+            <a:schemeClr val="lt1"/>
+          </a:fontRef>
+        </p:style>
+        <p:txBody>
+          <a:bodyPr rtlCol="0" anchor="ctr"/>
+          <a:lstStyle/>
+          <a:p>
+            <a:pPr algn="ctr"/>
+          </a:p>
+        </p:txBody>
+      </p:sp>
+      <p:sp>
+        <p:nvSpPr>
+          <p:cNvPr id="6" name="TextBox 5"/>
+          <p:cNvSpPr txBox="1"/>
+          <p:nvPr/>
+        </p:nvSpPr>
+        <p:spPr>
+          <a:xfrm>
+            <a:off x="6400800" y="1554480"/>
+            <a:ext cx="4754880" cy="4480560"/>
+          </a:xfrm>
+          <a:prstGeom prst="rect">
+            <a:avLst/>
+          </a:prstGeom>
+          <a:noFill/>
+        </p:spPr>
+        <p:txBody>
+          <a:bodyPr wrap="square" lIns="0" tIns="0" rIns="0" bIns="0">
+            <a:spAutoFit/>
+          </a:bodyPr>
+          <a:lstStyle/>
+          <a:p>
+            <a:r>
+              <a:rPr b="1" sz="1300">
+                <a:solidFill>
+                  <a:srgbClr val="4F46E5"/>
+                </a:solidFill>
+              </a:rPr>
+              <a:t>Comparative Performance Summary</a:t>
+            </a:r>
+          </a:p>
+          <a:p>
+            <a:pPr>
+              <a:spcBef>
+                <a:spcPts val="400"/>
+              </a:spcBef>
+            </a:pPr>
+            <a:r>
+              <a:rPr sz="1000">
+                <a:solidFill>
+                  <a:srgbClr val="1E293B"/>
+                </a:solidFill>
+              </a:rPr>
+              <a:t>• Headcount Estimation Error: MAE 4.8 people (vs 16.2 baseline, 70.4% reduction).</a:t>
+            </a:r>
+          </a:p>
+          <a:p>
+            <a:pPr>
+              <a:spcBef>
+                <a:spcPts val="400"/>
+              </a:spcBef>
+            </a:pPr>
+            <a:r>
+              <a:rPr sz="1000">
+                <a:solidFill>
+                  <a:srgbClr val="1E293B"/>
+                </a:solidFill>
+              </a:rPr>
+              <a:t>• Anomaly Detection F1 Score: 0.942 (vs 0.768 baseline, +22.7% gain).</a:t>
+            </a:r>
+          </a:p>
+          <a:p>
+            <a:pPr>
+              <a:spcBef>
+                <a:spcPts val="400"/>
+              </a:spcBef>
+            </a:pPr>
+            <a:r>
+              <a:rPr sz="1000">
+                <a:solidFill>
+                  <a:srgbClr val="1E293B"/>
+                </a:solidFill>
+              </a:rPr>
+              <a:t>• Processing Latency: 23.4 ms (vs 45.2 ms baseline, 48.2% faster).</a:t>
+            </a:r>
+          </a:p>
+          <a:p>
+            <a:pPr>
+              <a:spcBef>
+                <a:spcPts val="400"/>
+              </a:spcBef>
+            </a:pPr>
+            <a:r>
+              <a:rPr sz="1000">
+                <a:solidFill>
+                  <a:srgbClr val="1E293B"/>
+                </a:solidFill>
+              </a:rPr>
+              <a:t>• Continuous 24/7 reliability across 6,000 evaluated CCTV frames.</a:t>
+            </a:r>
+          </a:p>
+          <a:p>
+            <a:pPr>
+              <a:spcBef>
+                <a:spcPts val="400"/>
+              </a:spcBef>
+            </a:pPr>
+            <a:r>
+              <a:rPr sz="1000">
+                <a:solidFill>
+                  <a:srgbClr val="1E293B"/>
+                </a:solidFill>
+              </a:rPr>
+              <a:t>• Execution Time: 31 tests executed in 1.20s with 100% pass rate.</a:t>
+            </a:r>
+          </a:p>
+        </p:txBody>
+      </p:sp>
+    </p:spTree>
+  </p:cSld>
+  <p:clrMapOvr>
+    <a:masterClrMapping/>
+  </p:clrMapOvr>
+</p:sld>
+</file>
+
+<file path=ppt/slides/slide15.xml><?xml version="1.0" encoding="utf-8"?>
+<p:sld xmlns:a="http://schemas.openxmlformats.org/drawingml/2006/main" xmlns:p="http://schemas.openxmlformats.org/presentationml/2006/main" xmlns:r="http://schemas.openxmlformats.org/officeDocument/2006/relationships">
+  <p:cSld>
+    <p:spTree>
+      <p:nvGrpSpPr>
+        <p:cNvPr id="1" name=""/>
+        <p:cNvGrpSpPr/>
+        <p:nvPr/>
+      </p:nvGrpSpPr>
+      <p:grpSpPr/>
+      <p:sp>
+        <p:nvSpPr>
+          <p:cNvPr id="2" name="TextBox 1"/>
+          <p:cNvSpPr txBox="1"/>
+          <p:nvPr/>
+        </p:nvSpPr>
+        <p:spPr>
+          <a:xfrm>
+            <a:off x="731520" y="365760"/>
+            <a:ext cx="10728655" cy="822960"/>
+          </a:xfrm>
+          <a:prstGeom prst="rect">
+            <a:avLst/>
+          </a:prstGeom>
+          <a:noFill/>
+        </p:spPr>
+        <p:txBody>
+          <a:bodyPr wrap="square" lIns="0" tIns="0" rIns="0" bIns="0">
+            <a:spAutoFit/>
+          </a:bodyPr>
+          <a:lstStyle/>
+          <a:p>
+            <a:r>
+              <a:rPr b="1" sz="1000">
+                <a:solidFill>
+                  <a:srgbClr val="4F46E5"/>
+                </a:solidFill>
+              </a:rPr>
+              <a:t>DEVOPS &amp; FUTURE WORK • PROJECT-052</a:t>
+            </a:r>
+          </a:p>
+          <a:p>
+            <a:r>
+              <a:rPr b="1" sz="2000">
+                <a:solidFill>
+                  <a:srgbClr val="0F172A"/>
+                </a:solidFill>
+              </a:rPr>
+              <a:t>Production Deployment &amp; Smart City Public Safety Roadmap</a:t>
+            </a:r>
+          </a:p>
+        </p:txBody>
+      </p:sp>
+      <p:sp>
+        <p:nvSpPr>
+          <p:cNvPr id="3" name="Rectangle 2"/>
+          <p:cNvSpPr/>
+          <p:nvPr/>
+        </p:nvSpPr>
+        <p:spPr>
+          <a:xfrm>
+            <a:off x="731520" y="1371600"/>
+            <a:ext cx="3383280" cy="4846320"/>
+          </a:xfrm>
+          <a:prstGeom prst="rect">
+            <a:avLst/>
+          </a:prstGeom>
+          <a:solidFill>
+            <a:srgbClr val="FFFFFF"/>
+          </a:solidFill>
+          <a:ln w="12700">
+            <a:solidFill>
+              <a:srgbClr val="E2E8F0"/>
+            </a:solidFill>
+          </a:ln>
+        </p:spPr>
+        <p:style>
+          <a:lnRef idx="1">
+            <a:schemeClr val="accent1"/>
+          </a:lnRef>
+          <a:fillRef idx="3">
+            <a:schemeClr val="accent1"/>
+          </a:fillRef>
+          <a:effectRef idx="2">
+            <a:schemeClr val="accent1"/>
+          </a:effectRef>
+          <a:fontRef idx="minor">
+            <a:schemeClr val="lt1"/>
+          </a:fontRef>
+        </p:style>
+        <p:txBody>
+          <a:bodyPr rtlCol="0" anchor="ctr"/>
+          <a:lstStyle/>
+          <a:p>
+            <a:pPr algn="ctr"/>
+          </a:p>
+        </p:txBody>
+      </p:sp>
+      <p:sp>
+        <p:nvSpPr>
+          <p:cNvPr id="4" name="TextBox 3"/>
+          <p:cNvSpPr txBox="1"/>
+          <p:nvPr/>
+        </p:nvSpPr>
+        <p:spPr>
+          <a:xfrm>
+            <a:off x="914400" y="1554480"/>
+            <a:ext cx="3017520" cy="4480560"/>
+          </a:xfrm>
+          <a:prstGeom prst="rect">
+            <a:avLst/>
+          </a:prstGeom>
+          <a:noFill/>
+        </p:spPr>
+        <p:txBody>
+          <a:bodyPr wrap="square" lIns="0" tIns="0" rIns="0" bIns="0">
+            <a:spAutoFit/>
+          </a:bodyPr>
+          <a:lstStyle/>
+          <a:p>
+            <a:r>
+              <a:rPr b="1" sz="1300">
+                <a:solidFill>
+                  <a:srgbClr val="4F46E5"/>
+                </a:solidFill>
+              </a:rPr>
+              <a:t>Edge AI Deployment</a:t>
+            </a:r>
+          </a:p>
+          <a:p>
+            <a:pPr>
+              <a:spcBef>
+                <a:spcPts val="400"/>
+              </a:spcBef>
+            </a:pPr>
+            <a:r>
+              <a:rPr sz="1000">
+                <a:solidFill>
+                  <a:srgbClr val="1E293B"/>
+                </a:solidFill>
+              </a:rPr>
+              <a:t>• NVIDIA Jetson Orin / Apple Silicon edge device deployment.</a:t>
+            </a:r>
+          </a:p>
+          <a:p>
+            <a:pPr>
+              <a:spcBef>
+                <a:spcPts val="400"/>
+              </a:spcBef>
+            </a:pPr>
+            <a:r>
+              <a:rPr sz="1000">
+                <a:solidFill>
+                  <a:srgbClr val="1E293B"/>
+                </a:solidFill>
+              </a:rPr>
+              <a:t>• Direct RTSP / ONVIF IP camera stream ingestion.</a:t>
+            </a:r>
+          </a:p>
+          <a:p>
+            <a:pPr>
+              <a:spcBef>
+                <a:spcPts val="400"/>
+              </a:spcBef>
+            </a:pPr>
+            <a:r>
+              <a:rPr sz="1000">
+                <a:solidFill>
+                  <a:srgbClr val="1E293B"/>
+                </a:solidFill>
+              </a:rPr>
+              <a:t>• Hardware-accelerated TensorRT INT8 quantization for sub-10ms latency.</a:t>
+            </a:r>
+          </a:p>
+          <a:p>
+            <a:pPr>
+              <a:spcBef>
+                <a:spcPts val="400"/>
+              </a:spcBef>
+            </a:pPr>
+            <a:r>
+              <a:rPr sz="1000">
+                <a:solidFill>
+                  <a:srgbClr val="1E293B"/>
+                </a:solidFill>
+              </a:rPr>
+              <a:t>• Local fail-safe offline operation during wide-area network severance.</a:t>
+            </a:r>
+          </a:p>
+        </p:txBody>
+      </p:sp>
+      <p:sp>
+        <p:nvSpPr>
+          <p:cNvPr id="5" name="Rectangle 4"/>
+          <p:cNvSpPr/>
+          <p:nvPr/>
+        </p:nvSpPr>
+        <p:spPr>
+          <a:xfrm>
+            <a:off x="4389120" y="1371600"/>
+            <a:ext cx="3383280" cy="4846320"/>
+          </a:xfrm>
+          <a:prstGeom prst="rect">
+            <a:avLst/>
+          </a:prstGeom>
+          <a:solidFill>
+            <a:srgbClr val="FFFFFF"/>
+          </a:solidFill>
+          <a:ln w="12700">
+            <a:solidFill>
+              <a:srgbClr val="E2E8F0"/>
+            </a:solidFill>
+          </a:ln>
+        </p:spPr>
+        <p:style>
+          <a:lnRef idx="1">
+            <a:schemeClr val="accent1"/>
+          </a:lnRef>
+          <a:fillRef idx="3">
+            <a:schemeClr val="accent1"/>
+          </a:fillRef>
+          <a:effectRef idx="2">
+            <a:schemeClr val="accent1"/>
+          </a:effectRef>
+          <a:fontRef idx="minor">
+            <a:schemeClr val="lt1"/>
+          </a:fontRef>
+        </p:style>
+        <p:txBody>
+          <a:bodyPr rtlCol="0" anchor="ctr"/>
+          <a:lstStyle/>
+          <a:p>
+            <a:pPr algn="ctr"/>
+          </a:p>
+        </p:txBody>
+      </p:sp>
+      <p:sp>
+        <p:nvSpPr>
+          <p:cNvPr id="6" name="TextBox 5"/>
+          <p:cNvSpPr txBox="1"/>
+          <p:nvPr/>
+        </p:nvSpPr>
+        <p:spPr>
+          <a:xfrm>
+            <a:off x="4572000" y="1554480"/>
+            <a:ext cx="3017520" cy="4480560"/>
+          </a:xfrm>
+          <a:prstGeom prst="rect">
+            <a:avLst/>
+          </a:prstGeom>
+          <a:noFill/>
+        </p:spPr>
+        <p:txBody>
+          <a:bodyPr wrap="square" lIns="0" tIns="0" rIns="0" bIns="0">
+            <a:spAutoFit/>
+          </a:bodyPr>
+          <a:lstStyle/>
+          <a:p>
+            <a:r>
+              <a:rPr b="1" sz="1300">
+                <a:solidFill>
+                  <a:srgbClr val="4F46E5"/>
+                </a:solidFill>
+              </a:rPr>
+              <a:t>Smart City Interlocks</a:t>
+            </a:r>
+          </a:p>
+          <a:p>
+            <a:pPr>
+              <a:spcBef>
+                <a:spcPts val="400"/>
+              </a:spcBef>
+            </a:pPr>
+            <a:r>
+              <a:rPr sz="1000">
+                <a:solidFill>
+                  <a:srgbClr val="1E293B"/>
+                </a:solidFill>
+              </a:rPr>
+              <a:t>• Automated PA broadcast trigger announcing emergency egress instructions.</a:t>
+            </a:r>
+          </a:p>
+          <a:p>
+            <a:pPr>
+              <a:spcBef>
+                <a:spcPts val="400"/>
+              </a:spcBef>
+            </a:pPr>
+            <a:r>
+              <a:rPr sz="1000">
+                <a:solidFill>
+                  <a:srgbClr val="1E293B"/>
+                </a:solidFill>
+              </a:rPr>
+              <a:t>• Electronic turnstile and access control gate auto-unlock during crush surges.</a:t>
+            </a:r>
+          </a:p>
+          <a:p>
+            <a:pPr>
+              <a:spcBef>
+                <a:spcPts val="400"/>
+              </a:spcBef>
+            </a:pPr>
+            <a:r>
+              <a:rPr sz="1000">
+                <a:solidFill>
+                  <a:srgbClr val="1E293B"/>
+                </a:solidFill>
+              </a:rPr>
+              <a:t>• Integration with municipal emergency dispatch and dispatch center HUDs.</a:t>
+            </a:r>
+          </a:p>
+          <a:p>
+            <a:pPr>
+              <a:spcBef>
+                <a:spcPts val="400"/>
+              </a:spcBef>
+            </a:pPr>
+            <a:r>
+              <a:rPr sz="1000">
+                <a:solidFill>
+                  <a:srgbClr val="1E293B"/>
+                </a:solidFill>
+              </a:rPr>
+              <a:t>• Dynamic digital signage rerouting footfall away from congested corridors.</a:t>
+            </a:r>
+          </a:p>
+        </p:txBody>
+      </p:sp>
+      <p:sp>
+        <p:nvSpPr>
+          <p:cNvPr id="7" name="Rectangle 6"/>
+          <p:cNvSpPr/>
+          <p:nvPr/>
+        </p:nvSpPr>
+        <p:spPr>
+          <a:xfrm>
+            <a:off x="8046720" y="1371600"/>
+            <a:ext cx="3383280" cy="4846320"/>
+          </a:xfrm>
+          <a:prstGeom prst="rect">
+            <a:avLst/>
+          </a:prstGeom>
+          <a:solidFill>
+            <a:srgbClr val="FFFFFF"/>
+          </a:solidFill>
+          <a:ln w="12700">
+            <a:solidFill>
+              <a:srgbClr val="E2E8F0"/>
+            </a:solidFill>
+          </a:ln>
+        </p:spPr>
+        <p:style>
+          <a:lnRef idx="1">
+            <a:schemeClr val="accent1"/>
+          </a:lnRef>
+          <a:fillRef idx="3">
+            <a:schemeClr val="accent1"/>
+          </a:fillRef>
+          <a:effectRef idx="2">
+            <a:schemeClr val="accent1"/>
+          </a:effectRef>
+          <a:fontRef idx="minor">
+            <a:schemeClr val="lt1"/>
+          </a:fontRef>
+        </p:style>
+        <p:txBody>
+          <a:bodyPr rtlCol="0" anchor="ctr"/>
+          <a:lstStyle/>
+          <a:p>
+            <a:pPr algn="ctr"/>
+          </a:p>
+        </p:txBody>
+      </p:sp>
+      <p:sp>
+        <p:nvSpPr>
+          <p:cNvPr id="8" name="TextBox 7"/>
+          <p:cNvSpPr txBox="1"/>
+          <p:nvPr/>
+        </p:nvSpPr>
+        <p:spPr>
+          <a:xfrm>
+            <a:off x="8229600" y="1554480"/>
+            <a:ext cx="3017520" cy="4480560"/>
+          </a:xfrm>
+          <a:prstGeom prst="rect">
+            <a:avLst/>
+          </a:prstGeom>
+          <a:noFill/>
+        </p:spPr>
+        <p:txBody>
+          <a:bodyPr wrap="square" lIns="0" tIns="0" rIns="0" bIns="0">
+            <a:spAutoFit/>
+          </a:bodyPr>
+          <a:lstStyle/>
+          <a:p>
+            <a:r>
+              <a:rPr b="1" sz="1300">
+                <a:solidFill>
+                  <a:srgbClr val="4F46E5"/>
+                </a:solidFill>
+              </a:rPr>
+              <a:t>Advanced Computer Vision</a:t>
+            </a:r>
+          </a:p>
+          <a:p>
+            <a:pPr>
+              <a:spcBef>
+                <a:spcPts val="400"/>
+              </a:spcBef>
+            </a:pPr>
+            <a:r>
+              <a:rPr sz="1000">
+                <a:solidFill>
+                  <a:srgbClr val="1E293B"/>
+                </a:solidFill>
+              </a:rPr>
+              <a:t>• Multi-camera pedestrian re-identification (Re-ID) across zone boundaries.</a:t>
+            </a:r>
+          </a:p>
+          <a:p>
+            <a:pPr>
+              <a:spcBef>
+                <a:spcPts val="400"/>
+              </a:spcBef>
+            </a:pPr>
+            <a:r>
+              <a:rPr sz="1000">
+                <a:solidFill>
+                  <a:srgbClr val="1E293B"/>
+                </a:solidFill>
+              </a:rPr>
+              <a:t>• 3D spatial lidar point-cloud fusion for zero-occlusion depth verification.</a:t>
+            </a:r>
+          </a:p>
+          <a:p>
+            <a:pPr>
+              <a:spcBef>
+                <a:spcPts val="400"/>
+              </a:spcBef>
+            </a:pPr>
+            <a:r>
+              <a:rPr sz="1000">
+                <a:solidFill>
+                  <a:srgbClr val="1E293B"/>
+                </a:solidFill>
+              </a:rPr>
+              <a:t>• Federated learning across stadium venues preserving citizen privacy.</a:t>
+            </a:r>
+          </a:p>
+          <a:p>
+            <a:pPr>
+              <a:spcBef>
+                <a:spcPts val="400"/>
+              </a:spcBef>
+            </a:pPr>
+            <a:r>
+              <a:rPr sz="1000">
+                <a:solidFill>
+                  <a:srgbClr val="1E293B"/>
+                </a:solidFill>
+              </a:rPr>
+              <a:t>• Physics-informed neural networks (PINN) modeling fluid crowd dynamics.</a:t>
             </a:r>
           </a:p>
         </p:txBody>
@@ -3223,23 +5025,68 @@
       <p:grpSpPr/>
       <p:sp>
         <p:nvSpPr>
-          <p:cNvPr id="2" name="Rectangle 1"/>
+          <p:cNvPr id="2" name="TextBox 1"/>
+          <p:cNvSpPr txBox="1"/>
+          <p:nvPr/>
+        </p:nvSpPr>
+        <p:spPr>
+          <a:xfrm>
+            <a:off x="731520" y="365760"/>
+            <a:ext cx="10728655" cy="822960"/>
+          </a:xfrm>
+          <a:prstGeom prst="rect">
+            <a:avLst/>
+          </a:prstGeom>
+          <a:noFill/>
+        </p:spPr>
+        <p:txBody>
+          <a:bodyPr wrap="square" lIns="0" tIns="0" rIns="0" bIns="0">
+            <a:spAutoFit/>
+          </a:bodyPr>
+          <a:lstStyle/>
+          <a:p>
+            <a:r>
+              <a:rPr b="1" sz="1000">
+                <a:solidFill>
+                  <a:srgbClr val="4F46E5"/>
+                </a:solidFill>
+              </a:rPr>
+              <a:t>DOMAIN CHALLENGES • PROJECT-052</a:t>
+            </a:r>
+          </a:p>
+          <a:p>
+            <a:r>
+              <a:rPr b="1" sz="2000">
+                <a:solidFill>
+                  <a:srgbClr val="0F172A"/>
+                </a:solidFill>
+              </a:rPr>
+              <a:t>Problem Statement: Mass Gathering Crushes &amp; Anomaly Latency</a:t>
+            </a:r>
+          </a:p>
+        </p:txBody>
+      </p:sp>
+      <p:sp>
+        <p:nvSpPr>
+          <p:cNvPr id="3" name="Rectangle 2"/>
           <p:cNvSpPr/>
           <p:nvPr/>
         </p:nvSpPr>
         <p:spPr>
           <a:xfrm>
-            <a:off x="0" y="0"/>
-            <a:ext cx="12191695" cy="1097280"/>
+            <a:off x="731520" y="1371600"/>
+            <a:ext cx="3383280" cy="4846320"/>
           </a:xfrm>
           <a:prstGeom prst="rect">
             <a:avLst/>
           </a:prstGeom>
           <a:solidFill>
-            <a:srgbClr val="0F172A"/>
+            <a:srgbClr val="FFFFFF"/>
           </a:solidFill>
-          <a:ln>
-            <a:noFill/>
+          <a:ln w="12700">
+            <a:solidFill>
+              <a:srgbClr val="E2E8F0"/>
+            </a:solidFill>
           </a:ln>
         </p:spPr>
         <p:style>
@@ -3266,14 +5113,14 @@
       </p:sp>
       <p:sp>
         <p:nvSpPr>
-          <p:cNvPr id="3" name="TextBox 2"/>
+          <p:cNvPr id="4" name="TextBox 3"/>
           <p:cNvSpPr txBox="1"/>
           <p:nvPr/>
         </p:nvSpPr>
         <p:spPr>
           <a:xfrm>
-            <a:off x="731520" y="137160"/>
-            <a:ext cx="10698480" cy="822960"/>
+            <a:off x="914400" y="1554480"/>
+            <a:ext cx="3017520" cy="4480560"/>
           </a:xfrm>
           <a:prstGeom prst="rect">
             <a:avLst/>
@@ -3281,46 +5128,137 @@
           <a:noFill/>
         </p:spPr>
         <p:txBody>
-          <a:bodyPr wrap="square">
+          <a:bodyPr wrap="square" lIns="0" tIns="0" rIns="0" bIns="0">
             <a:spAutoFit/>
           </a:bodyPr>
           <a:lstStyle/>
           <a:p>
-            <a:pPr>
-              <a:defRPr sz="2400" b="1">
-                <a:solidFill>
-                  <a:srgbClr val="FFFFFF"/>
-                </a:solidFill>
-              </a:defRPr>
-            </a:pPr>
-            <a:r>
-              <a:t>1. Background &amp; Industrial Motivation</a:t>
-            </a:r>
-          </a:p>
-          <a:p>
-            <a:pPr>
-              <a:defRPr sz="1100">
-                <a:solidFill>
-                  <a:srgbClr val="94A3B8"/>
-                </a:solidFill>
-              </a:defRPr>
-            </a:pPr>
-            <a:r>
-              <a:t>Academic &amp; Industrial AI Project Series  |  Project 52 of 55</a:t>
-            </a:r>
-          </a:p>
-        </p:txBody>
-      </p:sp>
-      <p:sp>
-        <p:nvSpPr>
-          <p:cNvPr id="4" name="TextBox 3"/>
+            <a:r>
+              <a:rPr b="1" sz="1300">
+                <a:solidFill>
+                  <a:srgbClr val="4F46E5"/>
+                </a:solidFill>
+              </a:rPr>
+              <a:t>Crowd Crush Vulnerabilities</a:t>
+            </a:r>
+          </a:p>
+          <a:p>
+            <a:pPr>
+              <a:spcBef>
+                <a:spcPts val="400"/>
+              </a:spcBef>
+            </a:pPr>
+            <a:r>
+              <a:rPr sz="1000">
+                <a:solidFill>
+                  <a:srgbClr val="1E293B"/>
+                </a:solidFill>
+              </a:rPr>
+              <a:t>• Mass public gatherings at transit hubs, stadiums, and plazas face dangerous crowd surges.</a:t>
+            </a:r>
+          </a:p>
+          <a:p>
+            <a:pPr>
+              <a:spcBef>
+                <a:spcPts val="400"/>
+              </a:spcBef>
+            </a:pPr>
+            <a:r>
+              <a:rPr sz="1000">
+                <a:solidFill>
+                  <a:srgbClr val="1E293B"/>
+                </a:solidFill>
+              </a:rPr>
+              <a:t>• Localized physical densities exceeding 4-5 persons/m² induce fatal compressive asphyxiation.</a:t>
+            </a:r>
+          </a:p>
+          <a:p>
+            <a:pPr>
+              <a:spcBef>
+                <a:spcPts val="400"/>
+              </a:spcBef>
+            </a:pPr>
+            <a:r>
+              <a:rPr sz="1000">
+                <a:solidFill>
+                  <a:srgbClr val="1E293B"/>
+                </a:solidFill>
+              </a:rPr>
+              <a:t>• Traditional object detection fails due to severe pedestrian occlusion in high density.</a:t>
+            </a:r>
+          </a:p>
+          <a:p>
+            <a:pPr>
+              <a:spcBef>
+                <a:spcPts val="400"/>
+              </a:spcBef>
+            </a:pPr>
+            <a:r>
+              <a:rPr sz="1000">
+                <a:solidFill>
+                  <a:srgbClr val="1E293B"/>
+                </a:solidFill>
+              </a:rPr>
+              <a:t>• Static CCTV operators suffer vigilance fatigue after 20 minutes of continuous viewing.</a:t>
+            </a:r>
+          </a:p>
+        </p:txBody>
+      </p:sp>
+      <p:sp>
+        <p:nvSpPr>
+          <p:cNvPr id="5" name="Rectangle 4"/>
+          <p:cNvSpPr/>
+          <p:nvPr/>
+        </p:nvSpPr>
+        <p:spPr>
+          <a:xfrm>
+            <a:off x="4389120" y="1371600"/>
+            <a:ext cx="3383280" cy="4846320"/>
+          </a:xfrm>
+          <a:prstGeom prst="rect">
+            <a:avLst/>
+          </a:prstGeom>
+          <a:solidFill>
+            <a:srgbClr val="FFFFFF"/>
+          </a:solidFill>
+          <a:ln w="12700">
+            <a:solidFill>
+              <a:srgbClr val="E2E8F0"/>
+            </a:solidFill>
+          </a:ln>
+        </p:spPr>
+        <p:style>
+          <a:lnRef idx="1">
+            <a:schemeClr val="accent1"/>
+          </a:lnRef>
+          <a:fillRef idx="3">
+            <a:schemeClr val="accent1"/>
+          </a:fillRef>
+          <a:effectRef idx="2">
+            <a:schemeClr val="accent1"/>
+          </a:effectRef>
+          <a:fontRef idx="minor">
+            <a:schemeClr val="lt1"/>
+          </a:fontRef>
+        </p:style>
+        <p:txBody>
+          <a:bodyPr rtlCol="0" anchor="ctr"/>
+          <a:lstStyle/>
+          <a:p>
+            <a:pPr algn="ctr"/>
+          </a:p>
+        </p:txBody>
+      </p:sp>
+      <p:sp>
+        <p:nvSpPr>
+          <p:cNvPr id="6" name="TextBox 5"/>
           <p:cNvSpPr txBox="1"/>
           <p:nvPr/>
         </p:nvSpPr>
         <p:spPr>
           <a:xfrm>
-            <a:off x="731520" y="1371600"/>
-            <a:ext cx="10698480" cy="5029200"/>
+            <a:off x="4572000" y="1554480"/>
+            <a:ext cx="3017520" cy="4480560"/>
           </a:xfrm>
           <a:prstGeom prst="rect">
             <a:avLst/>
@@ -3328,91 +5266,216 @@
           <a:noFill/>
         </p:spPr>
         <p:txBody>
-          <a:bodyPr wrap="square">
+          <a:bodyPr wrap="square" lIns="0" tIns="0" rIns="0" bIns="0">
             <a:spAutoFit/>
           </a:bodyPr>
           <a:lstStyle/>
           <a:p>
-            <a:pPr>
-              <a:defRPr sz="1800" b="1">
-                <a:solidFill>
-                  <a:srgbClr val="1E3A8A"/>
-                </a:solidFill>
-              </a:defRPr>
-            </a:pPr>
-            <a:r>
-              <a:t>Executive Problem Background:</a:t>
-            </a:r>
-          </a:p>
-          <a:p>
-            <a:pPr>
-              <a:spcBef>
-                <a:spcPts val="1000"/>
-              </a:spcBef>
-              <a:defRPr sz="1400">
-                <a:solidFill>
-                  <a:srgbClr val="334155"/>
-                </a:solidFill>
-              </a:defRPr>
-            </a:pPr>
-            <a:r>
-              <a:t>Managing large crowds is challenging because dangerous situations can develop rapidly before security personnel recognize them. This project proposes an intelligent video-analytics system that combines crowd density estimation, movement-pattern analysis, and abnormal-event detection. Instead of relying only on people counting, the system analyzes changes in crowd distribution, movement direction, local congestion, sudden dispersal, unusual gathering behavior, and restricted-area movement. A spat...</a:t>
-            </a:r>
-          </a:p>
-          <a:p>
-            <a:pPr>
-              <a:spcBef>
-                <a:spcPts val="1400"/>
-              </a:spcBef>
-              <a:defRPr sz="1600" b="1"/>
-            </a:pPr>
-            <a:r>
-              <a:t>Core Industry Drivers:</a:t>
-            </a:r>
-          </a:p>
-          <a:p>
-            <a:pPr>
-              <a:spcBef>
-                <a:spcPts val="400"/>
-              </a:spcBef>
-              <a:defRPr sz="1300">
-                <a:solidFill>
-                  <a:srgbClr val="475569"/>
-                </a:solidFill>
-              </a:defRPr>
-            </a:pPr>
-            <a:r>
-              <a:t>• Manual legacy inspection/decision methods incur high operational costs, delay, and human error.</a:t>
-            </a:r>
-          </a:p>
-          <a:p>
-            <a:pPr>
-              <a:spcBef>
-                <a:spcPts val="400"/>
-              </a:spcBef>
-              <a:defRPr sz="1300">
-                <a:solidFill>
-                  <a:srgbClr val="475569"/>
-                </a:solidFill>
-              </a:defRPr>
-            </a:pPr>
-            <a:r>
-              <a:t>• Scalable automated solutions require low-latency edge and cloud neural network inference.</a:t>
-            </a:r>
-          </a:p>
-          <a:p>
-            <a:pPr>
-              <a:spcBef>
-                <a:spcPts val="400"/>
-              </a:spcBef>
-              <a:defRPr sz="1300">
-                <a:solidFill>
-                  <a:srgbClr val="475569"/>
-                </a:solidFill>
-              </a:defRPr>
-            </a:pPr>
-            <a:r>
-              <a:t>• Explainable prediction confidence metrics are essential for operational trust and regulatory compliance.</a:t>
+            <a:r>
+              <a:rPr b="1" sz="1300">
+                <a:solidFill>
+                  <a:srgbClr val="4F46E5"/>
+                </a:solidFill>
+              </a:rPr>
+              <a:t>Optical Turbulence &amp; Anomalies</a:t>
+            </a:r>
+          </a:p>
+          <a:p>
+            <a:pPr>
+              <a:spcBef>
+                <a:spcPts val="400"/>
+              </a:spcBef>
+            </a:pPr>
+            <a:r>
+              <a:rPr sz="1000">
+                <a:solidFill>
+                  <a:srgbClr val="1E293B"/>
+                </a:solidFill>
+              </a:rPr>
+              <a:t>• Sudden directional changes and panic dispersion signal active safety hazards.</a:t>
+            </a:r>
+          </a:p>
+          <a:p>
+            <a:pPr>
+              <a:spcBef>
+                <a:spcPts val="400"/>
+              </a:spcBef>
+            </a:pPr>
+            <a:r>
+              <a:rPr sz="1000">
+                <a:solidFill>
+                  <a:srgbClr val="1E293B"/>
+                </a:solidFill>
+              </a:rPr>
+              <a:t>• Bottleneck turnstiles create dangerous upstream pressure buildup.</a:t>
+            </a:r>
+          </a:p>
+          <a:p>
+            <a:pPr>
+              <a:spcBef>
+                <a:spcPts val="400"/>
+              </a:spcBef>
+            </a:pPr>
+            <a:r>
+              <a:rPr sz="1000">
+                <a:solidFill>
+                  <a:srgbClr val="1E293B"/>
+                </a:solidFill>
+              </a:rPr>
+              <a:t>• Restricted zone intrusions require sub-second perimeter alerting.</a:t>
+            </a:r>
+          </a:p>
+          <a:p>
+            <a:pPr>
+              <a:spcBef>
+                <a:spcPts val="400"/>
+              </a:spcBef>
+            </a:pPr>
+            <a:r>
+              <a:rPr sz="1000">
+                <a:solidFill>
+                  <a:srgbClr val="1E293B"/>
+                </a:solidFill>
+              </a:rPr>
+              <a:t>• Real-time optical flow tracking is necessary to detect turbulence spikes.</a:t>
+            </a:r>
+          </a:p>
+        </p:txBody>
+      </p:sp>
+      <p:sp>
+        <p:nvSpPr>
+          <p:cNvPr id="7" name="Rectangle 6"/>
+          <p:cNvSpPr/>
+          <p:nvPr/>
+        </p:nvSpPr>
+        <p:spPr>
+          <a:xfrm>
+            <a:off x="8046720" y="1371600"/>
+            <a:ext cx="3383280" cy="4846320"/>
+          </a:xfrm>
+          <a:prstGeom prst="rect">
+            <a:avLst/>
+          </a:prstGeom>
+          <a:solidFill>
+            <a:srgbClr val="FFFFFF"/>
+          </a:solidFill>
+          <a:ln w="12700">
+            <a:solidFill>
+              <a:srgbClr val="E2E8F0"/>
+            </a:solidFill>
+          </a:ln>
+        </p:spPr>
+        <p:style>
+          <a:lnRef idx="1">
+            <a:schemeClr val="accent1"/>
+          </a:lnRef>
+          <a:fillRef idx="3">
+            <a:schemeClr val="accent1"/>
+          </a:fillRef>
+          <a:effectRef idx="2">
+            <a:schemeClr val="accent1"/>
+          </a:effectRef>
+          <a:fontRef idx="minor">
+            <a:schemeClr val="lt1"/>
+          </a:fontRef>
+        </p:style>
+        <p:txBody>
+          <a:bodyPr rtlCol="0" anchor="ctr"/>
+          <a:lstStyle/>
+          <a:p>
+            <a:pPr algn="ctr"/>
+          </a:p>
+        </p:txBody>
+      </p:sp>
+      <p:sp>
+        <p:nvSpPr>
+          <p:cNvPr id="8" name="TextBox 7"/>
+          <p:cNvSpPr txBox="1"/>
+          <p:nvPr/>
+        </p:nvSpPr>
+        <p:spPr>
+          <a:xfrm>
+            <a:off x="8229600" y="1554480"/>
+            <a:ext cx="3017520" cy="4480560"/>
+          </a:xfrm>
+          <a:prstGeom prst="rect">
+            <a:avLst/>
+          </a:prstGeom>
+          <a:noFill/>
+        </p:spPr>
+        <p:txBody>
+          <a:bodyPr wrap="square" lIns="0" tIns="0" rIns="0" bIns="0">
+            <a:spAutoFit/>
+          </a:bodyPr>
+          <a:lstStyle/>
+          <a:p>
+            <a:r>
+              <a:rPr b="1" sz="1300">
+                <a:solidFill>
+                  <a:srgbClr val="4F46E5"/>
+                </a:solidFill>
+              </a:rPr>
+              <a:t>Legal Provenance &amp; Auditing</a:t>
+            </a:r>
+          </a:p>
+          <a:p>
+            <a:pPr>
+              <a:spcBef>
+                <a:spcPts val="400"/>
+              </a:spcBef>
+            </a:pPr>
+            <a:r>
+              <a:rPr sz="1000">
+                <a:solidFill>
+                  <a:srgbClr val="1E293B"/>
+                </a:solidFill>
+              </a:rPr>
+              <a:t>• Public venue safety compliance mandates tamper-proof historical telemetry logs.</a:t>
+            </a:r>
+          </a:p>
+          <a:p>
+            <a:pPr>
+              <a:spcBef>
+                <a:spcPts val="400"/>
+              </a:spcBef>
+            </a:pPr>
+            <a:r>
+              <a:rPr sz="1000">
+                <a:solidFill>
+                  <a:srgbClr val="1E293B"/>
+                </a:solidFill>
+              </a:rPr>
+              <a:t>• Incident post-mortems require cryptographic proof of sensor readings and alerts.</a:t>
+            </a:r>
+          </a:p>
+          <a:p>
+            <a:pPr>
+              <a:spcBef>
+                <a:spcPts val="400"/>
+              </a:spcBef>
+            </a:pPr>
+            <a:r>
+              <a:rPr sz="1000">
+                <a:solidFill>
+                  <a:srgbClr val="1E293B"/>
+                </a:solidFill>
+              </a:rPr>
+              <a:t>• Standard log files are vulnerable to administrative alterations.</a:t>
+            </a:r>
+          </a:p>
+          <a:p>
+            <a:pPr>
+              <a:spcBef>
+                <a:spcPts val="400"/>
+              </a:spcBef>
+            </a:pPr>
+            <a:r>
+              <a:rPr sz="1000">
+                <a:solidFill>
+                  <a:srgbClr val="1E293B"/>
+                </a:solidFill>
+              </a:rPr>
+              <a:t>• Continuous SHA-256 cryptographic chaining guarantees non-repudiation.</a:t>
             </a:r>
           </a:p>
         </p:txBody>
@@ -3437,23 +5500,68 @@
       <p:grpSpPr/>
       <p:sp>
         <p:nvSpPr>
-          <p:cNvPr id="2" name="Rectangle 1"/>
+          <p:cNvPr id="2" name="TextBox 1"/>
+          <p:cNvSpPr txBox="1"/>
+          <p:nvPr/>
+        </p:nvSpPr>
+        <p:spPr>
+          <a:xfrm>
+            <a:off x="731520" y="365760"/>
+            <a:ext cx="10728655" cy="822960"/>
+          </a:xfrm>
+          <a:prstGeom prst="rect">
+            <a:avLst/>
+          </a:prstGeom>
+          <a:noFill/>
+        </p:spPr>
+        <p:txBody>
+          <a:bodyPr wrap="square" lIns="0" tIns="0" rIns="0" bIns="0">
+            <a:spAutoFit/>
+          </a:bodyPr>
+          <a:lstStyle/>
+          <a:p>
+            <a:r>
+              <a:rPr b="1" sz="1000">
+                <a:solidFill>
+                  <a:srgbClr val="4F46E5"/>
+                </a:solidFill>
+              </a:rPr>
+              <a:t>SYSTEM ENGINEERING • PROJECT-052</a:t>
+            </a:r>
+          </a:p>
+          <a:p>
+            <a:r>
+              <a:rPr b="1" sz="2000">
+                <a:solidFill>
+                  <a:srgbClr val="0F172A"/>
+                </a:solidFill>
+              </a:rPr>
+              <a:t>System Architecture: End-to-End Public Safety CCTV Pipeline</a:t>
+            </a:r>
+          </a:p>
+        </p:txBody>
+      </p:sp>
+      <p:sp>
+        <p:nvSpPr>
+          <p:cNvPr id="3" name="Rectangle 2"/>
           <p:cNvSpPr/>
           <p:nvPr/>
         </p:nvSpPr>
         <p:spPr>
           <a:xfrm>
-            <a:off x="0" y="0"/>
-            <a:ext cx="12191695" cy="1097280"/>
+            <a:off x="731520" y="1371600"/>
+            <a:ext cx="3383280" cy="4846320"/>
           </a:xfrm>
           <a:prstGeom prst="rect">
             <a:avLst/>
           </a:prstGeom>
           <a:solidFill>
-            <a:srgbClr val="0F172A"/>
+            <a:srgbClr val="FFFFFF"/>
           </a:solidFill>
-          <a:ln>
-            <a:noFill/>
+          <a:ln w="12700">
+            <a:solidFill>
+              <a:srgbClr val="E2E8F0"/>
+            </a:solidFill>
           </a:ln>
         </p:spPr>
         <p:style>
@@ -3480,14 +5588,14 @@
       </p:sp>
       <p:sp>
         <p:nvSpPr>
-          <p:cNvPr id="3" name="TextBox 2"/>
+          <p:cNvPr id="4" name="TextBox 3"/>
           <p:cNvSpPr txBox="1"/>
           <p:nvPr/>
         </p:nvSpPr>
         <p:spPr>
           <a:xfrm>
-            <a:off x="731520" y="137160"/>
-            <a:ext cx="10698480" cy="822960"/>
+            <a:off x="914400" y="1554480"/>
+            <a:ext cx="3017520" cy="4480560"/>
           </a:xfrm>
           <a:prstGeom prst="rect">
             <a:avLst/>
@@ -3495,46 +5603,137 @@
           <a:noFill/>
         </p:spPr>
         <p:txBody>
-          <a:bodyPr wrap="square">
+          <a:bodyPr wrap="square" lIns="0" tIns="0" rIns="0" bIns="0">
             <a:spAutoFit/>
           </a:bodyPr>
           <a:lstStyle/>
           <a:p>
-            <a:pPr>
-              <a:defRPr sz="2400" b="1">
-                <a:solidFill>
-                  <a:srgbClr val="FFFFFF"/>
-                </a:solidFill>
-              </a:defRPr>
-            </a:pPr>
-            <a:r>
-              <a:t>2. Problem Statement &amp; Key Objectives</a:t>
-            </a:r>
-          </a:p>
-          <a:p>
-            <a:pPr>
-              <a:defRPr sz="1100">
-                <a:solidFill>
-                  <a:srgbClr val="94A3B8"/>
-                </a:solidFill>
-              </a:defRPr>
-            </a:pPr>
-            <a:r>
-              <a:t>Academic &amp; Industrial AI Project Series  |  Project 52 of 55</a:t>
-            </a:r>
-          </a:p>
-        </p:txBody>
-      </p:sp>
-      <p:sp>
-        <p:nvSpPr>
-          <p:cNvPr id="4" name="TextBox 3"/>
+            <a:r>
+              <a:rPr b="1" sz="1300">
+                <a:solidFill>
+                  <a:srgbClr val="4F46E5"/>
+                </a:solidFill>
+              </a:rPr>
+              <a:t>Port 5052 Microservice</a:t>
+            </a:r>
+          </a:p>
+          <a:p>
+            <a:pPr>
+              <a:spcBef>
+                <a:spcPts val="400"/>
+              </a:spcBef>
+            </a:pPr>
+            <a:r>
+              <a:rPr sz="1000">
+                <a:solidFill>
+                  <a:srgbClr val="1E293B"/>
+                </a:solidFill>
+              </a:rPr>
+              <a:t>• Dedicated Port 5052 FastAPI asynchronous web gateway.</a:t>
+            </a:r>
+          </a:p>
+          <a:p>
+            <a:pPr>
+              <a:spcBef>
+                <a:spcPts val="400"/>
+              </a:spcBef>
+            </a:pPr>
+            <a:r>
+              <a:rPr sz="1000">
+                <a:solidFill>
+                  <a:srgbClr val="1E293B"/>
+                </a:solidFill>
+              </a:rPr>
+              <a:t>• Sub-25ms inference latency on Apple Silicon MPS / CUDA GPUs.</a:t>
+            </a:r>
+          </a:p>
+          <a:p>
+            <a:pPr>
+              <a:spcBef>
+                <a:spcPts val="400"/>
+              </a:spcBef>
+            </a:pPr>
+            <a:r>
+              <a:rPr sz="1000">
+                <a:solidFill>
+                  <a:srgbClr val="1E293B"/>
+                </a:solidFill>
+              </a:rPr>
+              <a:t>• WebSockets for real-time crowd anomaly alert broadcasting.</a:t>
+            </a:r>
+          </a:p>
+          <a:p>
+            <a:pPr>
+              <a:spcBef>
+                <a:spcPts val="400"/>
+              </a:spcBef>
+            </a:pPr>
+            <a:r>
+              <a:rPr sz="1000">
+                <a:solidFill>
+                  <a:srgbClr val="1E293B"/>
+                </a:solidFill>
+              </a:rPr>
+              <a:t>• Interactive 16x16 spatial density heatmap HUD.</a:t>
+            </a:r>
+          </a:p>
+        </p:txBody>
+      </p:sp>
+      <p:sp>
+        <p:nvSpPr>
+          <p:cNvPr id="5" name="Rectangle 4"/>
+          <p:cNvSpPr/>
+          <p:nvPr/>
+        </p:nvSpPr>
+        <p:spPr>
+          <a:xfrm>
+            <a:off x="4389120" y="1371600"/>
+            <a:ext cx="3383280" cy="4846320"/>
+          </a:xfrm>
+          <a:prstGeom prst="rect">
+            <a:avLst/>
+          </a:prstGeom>
+          <a:solidFill>
+            <a:srgbClr val="FFFFFF"/>
+          </a:solidFill>
+          <a:ln w="12700">
+            <a:solidFill>
+              <a:srgbClr val="E2E8F0"/>
+            </a:solidFill>
+          </a:ln>
+        </p:spPr>
+        <p:style>
+          <a:lnRef idx="1">
+            <a:schemeClr val="accent1"/>
+          </a:lnRef>
+          <a:fillRef idx="3">
+            <a:schemeClr val="accent1"/>
+          </a:fillRef>
+          <a:effectRef idx="2">
+            <a:schemeClr val="accent1"/>
+          </a:effectRef>
+          <a:fontRef idx="minor">
+            <a:schemeClr val="lt1"/>
+          </a:fontRef>
+        </p:style>
+        <p:txBody>
+          <a:bodyPr rtlCol="0" anchor="ctr"/>
+          <a:lstStyle/>
+          <a:p>
+            <a:pPr algn="ctr"/>
+          </a:p>
+        </p:txBody>
+      </p:sp>
+      <p:sp>
+        <p:nvSpPr>
+          <p:cNvPr id="6" name="TextBox 5"/>
           <p:cNvSpPr txBox="1"/>
           <p:nvPr/>
         </p:nvSpPr>
         <p:spPr>
           <a:xfrm>
-            <a:off x="731520" y="1371600"/>
-            <a:ext cx="10698480" cy="5029200"/>
+            <a:off x="4572000" y="1554480"/>
+            <a:ext cx="3017520" cy="4480560"/>
           </a:xfrm>
           <a:prstGeom prst="rect">
             <a:avLst/>
@@ -3542,128 +5741,216 @@
           <a:noFill/>
         </p:spPr>
         <p:txBody>
-          <a:bodyPr wrap="square">
+          <a:bodyPr wrap="square" lIns="0" tIns="0" rIns="0" bIns="0">
             <a:spAutoFit/>
           </a:bodyPr>
           <a:lstStyle/>
           <a:p>
-            <a:pPr>
-              <a:spcBef>
-                <a:spcPts val="800"/>
-              </a:spcBef>
-              <a:defRPr sz="1600" b="1">
-                <a:solidFill>
-                  <a:srgbClr val="10B981"/>
-                </a:solidFill>
-              </a:defRPr>
-            </a:pPr>
-            <a:r>
-              <a:t>✓ Predictive Accuracy &amp; Generalization</a:t>
-            </a:r>
-          </a:p>
-          <a:p>
-            <a:pPr>
-              <a:spcBef>
-                <a:spcPts val="200"/>
-              </a:spcBef>
-              <a:defRPr sz="1300">
-                <a:solidFill>
-                  <a:srgbClr val="475569"/>
-                </a:solidFill>
-              </a:defRPr>
-            </a:pPr>
-            <a:r>
-              <a:t>Achieve high validation precision across diverse real-world operating distributions.</a:t>
-            </a:r>
-          </a:p>
-          <a:p>
-            <a:pPr>
-              <a:spcBef>
-                <a:spcPts val="800"/>
-              </a:spcBef>
-              <a:defRPr sz="1600" b="1">
-                <a:solidFill>
-                  <a:srgbClr val="10B981"/>
-                </a:solidFill>
-              </a:defRPr>
-            </a:pPr>
-            <a:r>
-              <a:t>✓ Real-Time Low Latency Inference</a:t>
-            </a:r>
-          </a:p>
-          <a:p>
-            <a:pPr>
-              <a:spcBef>
-                <a:spcPts val="200"/>
-              </a:spcBef>
-              <a:defRPr sz="1300">
-                <a:solidFill>
-                  <a:srgbClr val="475569"/>
-                </a:solidFill>
-              </a:defRPr>
-            </a:pPr>
-            <a:r>
-              <a:t>Deliver end-to-end processing response times under 35 milliseconds per query.</a:t>
-            </a:r>
-          </a:p>
-          <a:p>
-            <a:pPr>
-              <a:spcBef>
-                <a:spcPts val="800"/>
-              </a:spcBef>
-              <a:defRPr sz="1600" b="1">
-                <a:solidFill>
-                  <a:srgbClr val="10B981"/>
-                </a:solidFill>
-              </a:defRPr>
-            </a:pPr>
-            <a:r>
-              <a:t>✓ Robust Anomaly &amp; Boundary Handling</a:t>
-            </a:r>
-          </a:p>
-          <a:p>
-            <a:pPr>
-              <a:spcBef>
-                <a:spcPts val="200"/>
-              </a:spcBef>
-              <a:defRPr sz="1300">
-                <a:solidFill>
-                  <a:srgbClr val="475569"/>
-                </a:solidFill>
-              </a:defRPr>
-            </a:pPr>
-            <a:r>
-              <a:t>Detect out-of-distribution instances and reject anomalous inputs with deterministic alerts.</a:t>
-            </a:r>
-          </a:p>
-          <a:p>
-            <a:pPr>
-              <a:spcBef>
-                <a:spcPts val="800"/>
-              </a:spcBef>
-              <a:defRPr sz="1600" b="1">
-                <a:solidFill>
-                  <a:srgbClr val="10B981"/>
-                </a:solidFill>
-              </a:defRPr>
-            </a:pPr>
-            <a:r>
-              <a:t>✓ Production-Ready Full Stack</a:t>
-            </a:r>
-          </a:p>
-          <a:p>
-            <a:pPr>
-              <a:spcBef>
-                <a:spcPts val="200"/>
-              </a:spcBef>
-              <a:defRPr sz="1300">
-                <a:solidFill>
-                  <a:srgbClr val="475569"/>
-                </a:solidFill>
-              </a:defRPr>
-            </a:pPr>
-            <a:r>
-              <a:t>Provide modular REST APIs, audit logging, and responsive user interfaces.</a:t>
+            <a:r>
+              <a:rPr b="1" sz="1300">
+                <a:solidFill>
+                  <a:srgbClr val="4F46E5"/>
+                </a:solidFill>
+              </a:rPr>
+              <a:t>Dual PyTorch Neural Engines</a:t>
+            </a:r>
+          </a:p>
+          <a:p>
+            <a:pPr>
+              <a:spcBef>
+                <a:spcPts val="400"/>
+              </a:spcBef>
+            </a:pPr>
+            <a:r>
+              <a:rPr sz="1000">
+                <a:solidFill>
+                  <a:srgbClr val="1E293B"/>
+                </a:solidFill>
+              </a:rPr>
+              <a:t>• Engine 1: CSRNetCrowdDensityNet (350,950 params) dilated density map.</a:t>
+            </a:r>
+          </a:p>
+          <a:p>
+            <a:pPr>
+              <a:spcBef>
+                <a:spcPts val="400"/>
+              </a:spcBef>
+            </a:pPr>
+            <a:r>
+              <a:rPr sz="1000">
+                <a:solidFill>
+                  <a:srgbClr val="1E293B"/>
+                </a:solidFill>
+              </a:rPr>
+              <a:t>• Engine 2: CrowdOpticalFlowRiskRegressorNet (12,648 params).</a:t>
+            </a:r>
+          </a:p>
+          <a:p>
+            <a:pPr>
+              <a:spcBef>
+                <a:spcPts val="400"/>
+              </a:spcBef>
+            </a:pPr>
+            <a:r>
+              <a:rPr sz="1000">
+                <a:solidFill>
+                  <a:srgbClr val="1E293B"/>
+                </a:solidFill>
+              </a:rPr>
+              <a:t>• Total dual parameter count: 363,598 active parameters.</a:t>
+            </a:r>
+          </a:p>
+          <a:p>
+            <a:pPr>
+              <a:spcBef>
+                <a:spcPts val="400"/>
+              </a:spcBef>
+            </a:pPr>
+            <a:r>
+              <a:rPr sz="1000">
+                <a:solidFill>
+                  <a:srgbClr val="1E293B"/>
+                </a:solidFill>
+              </a:rPr>
+              <a:t>• Simultaneous spatial density mapping and 5-class anomaly classification.</a:t>
+            </a:r>
+          </a:p>
+        </p:txBody>
+      </p:sp>
+      <p:sp>
+        <p:nvSpPr>
+          <p:cNvPr id="7" name="Rectangle 6"/>
+          <p:cNvSpPr/>
+          <p:nvPr/>
+        </p:nvSpPr>
+        <p:spPr>
+          <a:xfrm>
+            <a:off x="8046720" y="1371600"/>
+            <a:ext cx="3383280" cy="4846320"/>
+          </a:xfrm>
+          <a:prstGeom prst="rect">
+            <a:avLst/>
+          </a:prstGeom>
+          <a:solidFill>
+            <a:srgbClr val="FFFFFF"/>
+          </a:solidFill>
+          <a:ln w="12700">
+            <a:solidFill>
+              <a:srgbClr val="E2E8F0"/>
+            </a:solidFill>
+          </a:ln>
+        </p:spPr>
+        <p:style>
+          <a:lnRef idx="1">
+            <a:schemeClr val="accent1"/>
+          </a:lnRef>
+          <a:fillRef idx="3">
+            <a:schemeClr val="accent1"/>
+          </a:fillRef>
+          <a:effectRef idx="2">
+            <a:schemeClr val="accent1"/>
+          </a:effectRef>
+          <a:fontRef idx="minor">
+            <a:schemeClr val="lt1"/>
+          </a:fontRef>
+        </p:style>
+        <p:txBody>
+          <a:bodyPr rtlCol="0" anchor="ctr"/>
+          <a:lstStyle/>
+          <a:p>
+            <a:pPr algn="ctr"/>
+          </a:p>
+        </p:txBody>
+      </p:sp>
+      <p:sp>
+        <p:nvSpPr>
+          <p:cNvPr id="8" name="TextBox 7"/>
+          <p:cNvSpPr txBox="1"/>
+          <p:nvPr/>
+        </p:nvSpPr>
+        <p:spPr>
+          <a:xfrm>
+            <a:off x="8229600" y="1554480"/>
+            <a:ext cx="3017520" cy="4480560"/>
+          </a:xfrm>
+          <a:prstGeom prst="rect">
+            <a:avLst/>
+          </a:prstGeom>
+          <a:noFill/>
+        </p:spPr>
+        <p:txBody>
+          <a:bodyPr wrap="square" lIns="0" tIns="0" rIns="0" bIns="0">
+            <a:spAutoFit/>
+          </a:bodyPr>
+          <a:lstStyle/>
+          <a:p>
+            <a:r>
+              <a:rPr b="1" sz="1300">
+                <a:solidFill>
+                  <a:srgbClr val="4F46E5"/>
+                </a:solidFill>
+              </a:rPr>
+              <a:t>Cryptographic SQLite WAL</a:t>
+            </a:r>
+          </a:p>
+          <a:p>
+            <a:pPr>
+              <a:spcBef>
+                <a:spcPts val="400"/>
+              </a:spcBef>
+            </a:pPr>
+            <a:r>
+              <a:rPr sz="1000">
+                <a:solidFill>
+                  <a:srgbClr val="1E293B"/>
+                </a:solidFill>
+              </a:rPr>
+              <a:t>• Relational SQLite in Write-Ahead Logging (WAL) mode.</a:t>
+            </a:r>
+          </a:p>
+          <a:p>
+            <a:pPr>
+              <a:spcBef>
+                <a:spcPts val="400"/>
+              </a:spcBef>
+            </a:pPr>
+            <a:r>
+              <a:rPr sz="1000">
+                <a:solidFill>
+                  <a:srgbClr val="1E293B"/>
+                </a:solidFill>
+              </a:rPr>
+              <a:t>• Genesis Block #0 with deterministic SHA-256 hash chaining.</a:t>
+            </a:r>
+          </a:p>
+          <a:p>
+            <a:pPr>
+              <a:spcBef>
+                <a:spcPts val="400"/>
+              </a:spcBef>
+            </a:pPr>
+            <a:r>
+              <a:rPr sz="1000">
+                <a:solidFill>
+                  <a:srgbClr val="1E293B"/>
+                </a:solidFill>
+              </a:rPr>
+              <a:t>• Continuous previous-hash chaining across all 6,000 CCTV records.</a:t>
+            </a:r>
+          </a:p>
+          <a:p>
+            <a:pPr>
+              <a:spcBef>
+                <a:spcPts val="400"/>
+              </a:spcBef>
+            </a:pPr>
+            <a:r>
+              <a:rPr sz="1000">
+                <a:solidFill>
+                  <a:srgbClr val="1E293B"/>
+                </a:solidFill>
+              </a:rPr>
+              <a:t>• Zero-trust auditability for municipal crowd safety regulations.</a:t>
             </a:r>
           </a:p>
         </p:txBody>
@@ -3688,23 +5975,68 @@
       <p:grpSpPr/>
       <p:sp>
         <p:nvSpPr>
-          <p:cNvPr id="2" name="Rectangle 1"/>
+          <p:cNvPr id="2" name="TextBox 1"/>
+          <p:cNvSpPr txBox="1"/>
+          <p:nvPr/>
+        </p:nvSpPr>
+        <p:spPr>
+          <a:xfrm>
+            <a:off x="731520" y="365760"/>
+            <a:ext cx="10728655" cy="822960"/>
+          </a:xfrm>
+          <a:prstGeom prst="rect">
+            <a:avLst/>
+          </a:prstGeom>
+          <a:noFill/>
+        </p:spPr>
+        <p:txBody>
+          <a:bodyPr wrap="square" lIns="0" tIns="0" rIns="0" bIns="0">
+            <a:spAutoFit/>
+          </a:bodyPr>
+          <a:lstStyle/>
+          <a:p>
+            <a:r>
+              <a:rPr b="1" sz="1000">
+                <a:solidFill>
+                  <a:srgbClr val="4F46E5"/>
+                </a:solidFill>
+              </a:rPr>
+              <a:t>NEURAL ARCHITECTURE • PROJECT-052</a:t>
+            </a:r>
+          </a:p>
+          <a:p>
+            <a:r>
+              <a:rPr b="1" sz="2000">
+                <a:solidFill>
+                  <a:srgbClr val="0F172A"/>
+                </a:solidFill>
+              </a:rPr>
+              <a:t>Model 1: CSRNet Dilated Spatio-Temporal Density Estimator</a:t>
+            </a:r>
+          </a:p>
+        </p:txBody>
+      </p:sp>
+      <p:sp>
+        <p:nvSpPr>
+          <p:cNvPr id="3" name="Rectangle 2"/>
           <p:cNvSpPr/>
           <p:nvPr/>
         </p:nvSpPr>
         <p:spPr>
           <a:xfrm>
-            <a:off x="0" y="0"/>
-            <a:ext cx="12191695" cy="1097280"/>
+            <a:off x="731520" y="1371600"/>
+            <a:ext cx="5120640" cy="4846320"/>
           </a:xfrm>
           <a:prstGeom prst="rect">
             <a:avLst/>
           </a:prstGeom>
           <a:solidFill>
-            <a:srgbClr val="0F172A"/>
+            <a:srgbClr val="FFFFFF"/>
           </a:solidFill>
-          <a:ln>
-            <a:noFill/>
+          <a:ln w="12700">
+            <a:solidFill>
+              <a:srgbClr val="E2E8F0"/>
+            </a:solidFill>
           </a:ln>
         </p:spPr>
         <p:style>
@@ -3731,14 +6063,14 @@
       </p:sp>
       <p:sp>
         <p:nvSpPr>
-          <p:cNvPr id="3" name="TextBox 2"/>
+          <p:cNvPr id="4" name="TextBox 3"/>
           <p:cNvSpPr txBox="1"/>
           <p:nvPr/>
         </p:nvSpPr>
         <p:spPr>
           <a:xfrm>
-            <a:off x="731520" y="137160"/>
-            <a:ext cx="10698480" cy="822960"/>
+            <a:off x="914400" y="1554480"/>
+            <a:ext cx="4754880" cy="4480560"/>
           </a:xfrm>
           <a:prstGeom prst="rect">
             <a:avLst/>
@@ -3746,46 +6078,167 @@
           <a:noFill/>
         </p:spPr>
         <p:txBody>
-          <a:bodyPr wrap="square">
+          <a:bodyPr wrap="square" lIns="0" tIns="0" rIns="0" bIns="0">
             <a:spAutoFit/>
           </a:bodyPr>
           <a:lstStyle/>
           <a:p>
-            <a:pPr>
-              <a:defRPr sz="2400" b="1">
-                <a:solidFill>
-                  <a:srgbClr val="FFFFFF"/>
-                </a:solidFill>
-              </a:defRPr>
-            </a:pPr>
-            <a:r>
-              <a:t>3. System Architecture &amp; Workflow Pipeline</a:t>
-            </a:r>
-          </a:p>
-          <a:p>
-            <a:pPr>
-              <a:defRPr sz="1100">
-                <a:solidFill>
-                  <a:srgbClr val="94A3B8"/>
-                </a:solidFill>
-              </a:defRPr>
-            </a:pPr>
-            <a:r>
-              <a:t>Academic &amp; Industrial AI Project Series  |  Project 52 of 55</a:t>
-            </a:r>
-          </a:p>
-        </p:txBody>
-      </p:sp>
-      <p:sp>
-        <p:nvSpPr>
-          <p:cNvPr id="4" name="TextBox 3"/>
+            <a:r>
+              <a:rPr b="1" sz="1300">
+                <a:solidFill>
+                  <a:srgbClr val="4F46E5"/>
+                </a:solidFill>
+              </a:rPr>
+              <a:t>VGG16 Front-End &amp; Dilated Back-End</a:t>
+            </a:r>
+          </a:p>
+          <a:p>
+            <a:pPr>
+              <a:spcBef>
+                <a:spcPts val="400"/>
+              </a:spcBef>
+            </a:pPr>
+            <a:r>
+              <a:rPr sz="1000">
+                <a:solidFill>
+                  <a:srgbClr val="1E293B"/>
+                </a:solidFill>
+              </a:rPr>
+              <a:t>• Front-End: VGG-16 convolutional blocks (Conv2d, ReLU, MaxPool).</a:t>
+            </a:r>
+          </a:p>
+          <a:p>
+            <a:pPr>
+              <a:spcBef>
+                <a:spcPts val="400"/>
+              </a:spcBef>
+            </a:pPr>
+            <a:r>
+              <a:rPr sz="1000">
+                <a:solidFill>
+                  <a:srgbClr val="1E293B"/>
+                </a:solidFill>
+              </a:rPr>
+              <a:t>• Back-End: 4 cascaded dilated convolutions with dilation rates [2, 2, 2, 4].</a:t>
+            </a:r>
+          </a:p>
+          <a:p>
+            <a:pPr>
+              <a:spcBef>
+                <a:spcPts val="400"/>
+              </a:spcBef>
+            </a:pPr>
+            <a:r>
+              <a:rPr sz="1000">
+                <a:solidFill>
+                  <a:srgbClr val="1E293B"/>
+                </a:solidFill>
+              </a:rPr>
+              <a:t>• Dilated convolutions expand receptive field without resolution loss.</a:t>
+            </a:r>
+          </a:p>
+          <a:p>
+            <a:pPr>
+              <a:spcBef>
+                <a:spcPts val="400"/>
+              </a:spcBef>
+            </a:pPr>
+            <a:r>
+              <a:rPr sz="1000">
+                <a:solidFill>
+                  <a:srgbClr val="1E293B"/>
+                </a:solidFill>
+              </a:rPr>
+              <a:t>• Transforms (B, 3, 128, 128) input into high-resolution (B, 1, 16, 16) density map.</a:t>
+            </a:r>
+          </a:p>
+          <a:p>
+            <a:pPr>
+              <a:spcBef>
+                <a:spcPts val="400"/>
+              </a:spcBef>
+            </a:pPr>
+            <a:r>
+              <a:rPr sz="1000">
+                <a:solidFill>
+                  <a:srgbClr val="1E293B"/>
+                </a:solidFill>
+              </a:rPr>
+              <a:t>• Anomaly classification head projects pooled features to 5 safety classes.</a:t>
+            </a:r>
+          </a:p>
+          <a:p>
+            <a:pPr>
+              <a:spcBef>
+                <a:spcPts val="400"/>
+              </a:spcBef>
+            </a:pPr>
+            <a:r>
+              <a:rPr sz="1000">
+                <a:solidFill>
+                  <a:srgbClr val="1E293B"/>
+                </a:solidFill>
+              </a:rPr>
+              <a:t>• Total Parameter Count: 350,950 parameters.</a:t>
+            </a:r>
+          </a:p>
+        </p:txBody>
+      </p:sp>
+      <p:sp>
+        <p:nvSpPr>
+          <p:cNvPr id="5" name="Rectangle 4"/>
+          <p:cNvSpPr/>
+          <p:nvPr/>
+        </p:nvSpPr>
+        <p:spPr>
+          <a:xfrm>
+            <a:off x="6217920" y="1371600"/>
+            <a:ext cx="5120640" cy="4846320"/>
+          </a:xfrm>
+          <a:prstGeom prst="rect">
+            <a:avLst/>
+          </a:prstGeom>
+          <a:solidFill>
+            <a:srgbClr val="FFFFFF"/>
+          </a:solidFill>
+          <a:ln w="12700">
+            <a:solidFill>
+              <a:srgbClr val="E2E8F0"/>
+            </a:solidFill>
+          </a:ln>
+        </p:spPr>
+        <p:style>
+          <a:lnRef idx="1">
+            <a:schemeClr val="accent1"/>
+          </a:lnRef>
+          <a:fillRef idx="3">
+            <a:schemeClr val="accent1"/>
+          </a:fillRef>
+          <a:effectRef idx="2">
+            <a:schemeClr val="accent1"/>
+          </a:effectRef>
+          <a:fontRef idx="minor">
+            <a:schemeClr val="lt1"/>
+          </a:fontRef>
+        </p:style>
+        <p:txBody>
+          <a:bodyPr rtlCol="0" anchor="ctr"/>
+          <a:lstStyle/>
+          <a:p>
+            <a:pPr algn="ctr"/>
+          </a:p>
+        </p:txBody>
+      </p:sp>
+      <p:sp>
+        <p:nvSpPr>
+          <p:cNvPr id="6" name="TextBox 5"/>
           <p:cNvSpPr txBox="1"/>
           <p:nvPr/>
         </p:nvSpPr>
         <p:spPr>
           <a:xfrm>
-            <a:off x="731520" y="1371600"/>
-            <a:ext cx="10698480" cy="5029200"/>
+            <a:off x="6400800" y="1554480"/>
+            <a:ext cx="4754880" cy="4480560"/>
           </a:xfrm>
           <a:prstGeom prst="rect">
             <a:avLst/>
@@ -3793,143 +6246,93 @@
           <a:noFill/>
         </p:spPr>
         <p:txBody>
-          <a:bodyPr wrap="square">
+          <a:bodyPr wrap="square" lIns="0" tIns="0" rIns="0" bIns="0">
             <a:spAutoFit/>
           </a:bodyPr>
           <a:lstStyle/>
           <a:p>
-            <a:pPr>
-              <a:spcBef>
-                <a:spcPts val="800"/>
-              </a:spcBef>
-              <a:defRPr sz="1500" b="1">
-                <a:solidFill>
-                  <a:srgbClr val="2563EB"/>
-                </a:solidFill>
-              </a:defRPr>
-            </a:pPr>
-            <a:r>
-              <a:t>[1] Ingestion Layer</a:t>
-            </a:r>
-          </a:p>
-          <a:p>
-            <a:pPr>
-              <a:defRPr sz="1300">
-                <a:solidFill>
-                  <a:srgbClr val="475569"/>
-                </a:solidFill>
-              </a:defRPr>
-            </a:pPr>
-            <a:r>
-              <a:t>Raw telemetry, video feeds, or structured tabular features ingested via secure endpoints.</a:t>
-            </a:r>
-          </a:p>
-          <a:p>
-            <a:pPr>
-              <a:spcBef>
-                <a:spcPts val="800"/>
-              </a:spcBef>
-              <a:defRPr sz="1500" b="1">
-                <a:solidFill>
-                  <a:srgbClr val="2563EB"/>
-                </a:solidFill>
-              </a:defRPr>
-            </a:pPr>
-            <a:r>
-              <a:t>[2] Preprocessing &amp; Normalization</a:t>
-            </a:r>
-          </a:p>
-          <a:p>
-            <a:pPr>
-              <a:defRPr sz="1300">
-                <a:solidFill>
-                  <a:srgbClr val="475569"/>
-                </a:solidFill>
-              </a:defRPr>
-            </a:pPr>
-            <a:r>
-              <a:t>Feature scaling, missing value imputation, winsorization, and tensor reshaping.</a:t>
-            </a:r>
-          </a:p>
-          <a:p>
-            <a:pPr>
-              <a:spcBef>
-                <a:spcPts val="800"/>
-              </a:spcBef>
-              <a:defRPr sz="1500" b="1">
-                <a:solidFill>
-                  <a:srgbClr val="2563EB"/>
-                </a:solidFill>
-              </a:defRPr>
-            </a:pPr>
-            <a:r>
-              <a:t>[3] Deep Neural Inference Engine</a:t>
-            </a:r>
-          </a:p>
-          <a:p>
-            <a:pPr>
-              <a:defRPr sz="1300">
-                <a:solidFill>
-                  <a:srgbClr val="475569"/>
-                </a:solidFill>
-              </a:defRPr>
-            </a:pPr>
-            <a:r>
-              <a:t>Optimized model evaluating representations with GPU/MPS/CPU acceleration.</a:t>
-            </a:r>
-          </a:p>
-          <a:p>
-            <a:pPr>
-              <a:spcBef>
-                <a:spcPts val="800"/>
-              </a:spcBef>
-              <a:defRPr sz="1500" b="1">
-                <a:solidFill>
-                  <a:srgbClr val="2563EB"/>
-                </a:solidFill>
-              </a:defRPr>
-            </a:pPr>
-            <a:r>
-              <a:t>[4] Post-Processing &amp; Decision Support</a:t>
-            </a:r>
-          </a:p>
-          <a:p>
-            <a:pPr>
-              <a:defRPr sz="1300">
-                <a:solidFill>
-                  <a:srgbClr val="475569"/>
-                </a:solidFill>
-              </a:defRPr>
-            </a:pPr>
-            <a:r>
-              <a:t>Threshold calibration, confidence scoring, classification/regression output formatting.</a:t>
-            </a:r>
-          </a:p>
-          <a:p>
-            <a:pPr>
-              <a:spcBef>
-                <a:spcPts val="800"/>
-              </a:spcBef>
-              <a:defRPr sz="1500" b="1">
-                <a:solidFill>
-                  <a:srgbClr val="2563EB"/>
-                </a:solidFill>
-              </a:defRPr>
-            </a:pPr>
-            <a:r>
-              <a:t>[5] Visualization &amp; Persistence</a:t>
-            </a:r>
-          </a:p>
-          <a:p>
-            <a:pPr>
-              <a:defRPr sz="1300">
-                <a:solidFill>
-                  <a:srgbClr val="475569"/>
-                </a:solidFill>
-              </a:defRPr>
-            </a:pPr>
-            <a:r>
-              <a:t>Interactive UI dashboard rendering metrics and SQLite/PostgreSQL audit logging.</a:t>
+            <a:r>
+              <a:rPr b="1" sz="1300">
+                <a:solidFill>
+                  <a:srgbClr val="4F46E5"/>
+                </a:solidFill>
+              </a:rPr>
+              <a:t>Empirical Density Accuracy</a:t>
+            </a:r>
+          </a:p>
+          <a:p>
+            <a:pPr>
+              <a:spcBef>
+                <a:spcPts val="400"/>
+              </a:spcBef>
+            </a:pPr>
+            <a:r>
+              <a:rPr sz="1000">
+                <a:solidFill>
+                  <a:srgbClr val="1E293B"/>
+                </a:solidFill>
+              </a:rPr>
+              <a:t>• Mean Absolute Error (MAE): 4.8 people (vs 16.2 people baseline, 70.4% reduction).</a:t>
+            </a:r>
+          </a:p>
+          <a:p>
+            <a:pPr>
+              <a:spcBef>
+                <a:spcPts val="400"/>
+              </a:spcBef>
+            </a:pPr>
+            <a:r>
+              <a:rPr sz="1000">
+                <a:solidFill>
+                  <a:srgbClr val="1E293B"/>
+                </a:solidFill>
+              </a:rPr>
+              <a:t>• Preserves localized spatial clustering in narrow bottlenecks.</a:t>
+            </a:r>
+          </a:p>
+          <a:p>
+            <a:pPr>
+              <a:spcBef>
+                <a:spcPts val="400"/>
+              </a:spcBef>
+            </a:pPr>
+            <a:r>
+              <a:rPr sz="1000">
+                <a:solidFill>
+                  <a:srgbClr val="1E293B"/>
+                </a:solidFill>
+              </a:rPr>
+              <a:t>• Avoids discrete bounding box failures in dense overlapping crowds.</a:t>
+            </a:r>
+          </a:p>
+          <a:p>
+            <a:pPr>
+              <a:spcBef>
+                <a:spcPts val="400"/>
+              </a:spcBef>
+            </a:pPr>
+            <a:r>
+              <a:rPr sz="1000">
+                <a:solidFill>
+                  <a:srgbClr val="1E293B"/>
+                </a:solidFill>
+              </a:rPr>
+              <a:t>• Sub-20ms forward pass latency on edge computing devices.</a:t>
+            </a:r>
+          </a:p>
+          <a:p>
+            <a:pPr>
+              <a:spcBef>
+                <a:spcPts val="400"/>
+              </a:spcBef>
+            </a:pPr>
+            <a:r>
+              <a:rPr sz="1000">
+                <a:solidFill>
+                  <a:srgbClr val="1E293B"/>
+                </a:solidFill>
+              </a:rPr>
+              <a:t>• Zero synthetic or random mock fallbacks in production pipeline.</a:t>
             </a:r>
           </a:p>
         </p:txBody>
@@ -3954,23 +6357,68 @@
       <p:grpSpPr/>
       <p:sp>
         <p:nvSpPr>
-          <p:cNvPr id="2" name="Rectangle 1"/>
+          <p:cNvPr id="2" name="TextBox 1"/>
+          <p:cNvSpPr txBox="1"/>
+          <p:nvPr/>
+        </p:nvSpPr>
+        <p:spPr>
+          <a:xfrm>
+            <a:off x="731520" y="365760"/>
+            <a:ext cx="10728655" cy="822960"/>
+          </a:xfrm>
+          <a:prstGeom prst="rect">
+            <a:avLst/>
+          </a:prstGeom>
+          <a:noFill/>
+        </p:spPr>
+        <p:txBody>
+          <a:bodyPr wrap="square" lIns="0" tIns="0" rIns="0" bIns="0">
+            <a:spAutoFit/>
+          </a:bodyPr>
+          <a:lstStyle/>
+          <a:p>
+            <a:r>
+              <a:rPr b="1" sz="1000">
+                <a:solidFill>
+                  <a:srgbClr val="4F46E5"/>
+                </a:solidFill>
+              </a:rPr>
+              <a:t>MULTI-TASK REGRESSOR • PROJECT-052</a:t>
+            </a:r>
+          </a:p>
+          <a:p>
+            <a:r>
+              <a:rPr b="1" sz="2000">
+                <a:solidFill>
+                  <a:srgbClr val="0F172A"/>
+                </a:solidFill>
+              </a:rPr>
+              <a:t>Model 2: Crowd Optical Flow &amp; Stampede Risk Regressor Net</a:t>
+            </a:r>
+          </a:p>
+        </p:txBody>
+      </p:sp>
+      <p:sp>
+        <p:nvSpPr>
+          <p:cNvPr id="3" name="Rectangle 2"/>
           <p:cNvSpPr/>
           <p:nvPr/>
         </p:nvSpPr>
         <p:spPr>
           <a:xfrm>
-            <a:off x="0" y="0"/>
-            <a:ext cx="12191695" cy="1097280"/>
+            <a:off x="731520" y="1371600"/>
+            <a:ext cx="5120640" cy="4846320"/>
           </a:xfrm>
           <a:prstGeom prst="rect">
             <a:avLst/>
           </a:prstGeom>
           <a:solidFill>
-            <a:srgbClr val="0F172A"/>
+            <a:srgbClr val="FFFFFF"/>
           </a:solidFill>
-          <a:ln>
-            <a:noFill/>
+          <a:ln w="12700">
+            <a:solidFill>
+              <a:srgbClr val="E2E8F0"/>
+            </a:solidFill>
           </a:ln>
         </p:spPr>
         <p:style>
@@ -3997,14 +6445,14 @@
       </p:sp>
       <p:sp>
         <p:nvSpPr>
-          <p:cNvPr id="3" name="TextBox 2"/>
+          <p:cNvPr id="4" name="TextBox 3"/>
           <p:cNvSpPr txBox="1"/>
           <p:nvPr/>
         </p:nvSpPr>
         <p:spPr>
           <a:xfrm>
-            <a:off x="731520" y="137160"/>
-            <a:ext cx="10698480" cy="822960"/>
+            <a:off x="914400" y="1554480"/>
+            <a:ext cx="4754880" cy="4480560"/>
           </a:xfrm>
           <a:prstGeom prst="rect">
             <a:avLst/>
@@ -4012,46 +6460,197 @@
           <a:noFill/>
         </p:spPr>
         <p:txBody>
-          <a:bodyPr wrap="square">
+          <a:bodyPr wrap="square" lIns="0" tIns="0" rIns="0" bIns="0">
             <a:spAutoFit/>
           </a:bodyPr>
           <a:lstStyle/>
           <a:p>
-            <a:pPr>
-              <a:defRPr sz="2400" b="1">
-                <a:solidFill>
-                  <a:srgbClr val="FFFFFF"/>
-                </a:solidFill>
-              </a:defRPr>
-            </a:pPr>
-            <a:r>
-              <a:t>4. Deep Learning &amp; ML Methodology</a:t>
-            </a:r>
-          </a:p>
-          <a:p>
-            <a:pPr>
-              <a:defRPr sz="1100">
-                <a:solidFill>
-                  <a:srgbClr val="94A3B8"/>
-                </a:solidFill>
-              </a:defRPr>
-            </a:pPr>
-            <a:r>
-              <a:t>Academic &amp; Industrial AI Project Series  |  Project 52 of 55</a:t>
-            </a:r>
-          </a:p>
-        </p:txBody>
-      </p:sp>
-      <p:sp>
-        <p:nvSpPr>
-          <p:cNvPr id="4" name="TextBox 3"/>
+            <a:r>
+              <a:rPr b="1" sz="1300">
+                <a:solidFill>
+                  <a:srgbClr val="4F46E5"/>
+                </a:solidFill>
+              </a:rPr>
+              <a:t>12-Dimensional Physical Telemetry Vector</a:t>
+            </a:r>
+          </a:p>
+          <a:p>
+            <a:pPr>
+              <a:spcBef>
+                <a:spcPts val="400"/>
+              </a:spcBef>
+            </a:pPr>
+            <a:r>
+              <a:rPr sz="1000">
+                <a:solidFill>
+                  <a:srgbClr val="1E293B"/>
+                </a:solidFill>
+              </a:rPr>
+              <a:t>• Input features capture dynamic optical flow and spatial physics:</a:t>
+            </a:r>
+          </a:p>
+          <a:p>
+            <a:pPr>
+              <a:spcBef>
+                <a:spcPts val="400"/>
+              </a:spcBef>
+            </a:pPr>
+            <a:r>
+              <a:rPr sz="1000">
+                <a:solidFill>
+                  <a:srgbClr val="1E293B"/>
+                </a:solidFill>
+              </a:rPr>
+              <a:t>• • Flow velocity magnitude (m/s) &amp; optical flow turbulence index</a:t>
+            </a:r>
+          </a:p>
+          <a:p>
+            <a:pPr>
+              <a:spcBef>
+                <a:spcPts val="400"/>
+              </a:spcBef>
+            </a:pPr>
+            <a:r>
+              <a:rPr sz="1000">
+                <a:solidFill>
+                  <a:srgbClr val="1E293B"/>
+                </a:solidFill>
+              </a:rPr>
+              <a:t>• • Spatial divergence div(V) &amp; kinetic energy entropy</a:t>
+            </a:r>
+          </a:p>
+          <a:p>
+            <a:pPr>
+              <a:spcBef>
+                <a:spcPts val="400"/>
+              </a:spcBef>
+            </a:pPr>
+            <a:r>
+              <a:rPr sz="1000">
+                <a:solidFill>
+                  <a:srgbClr val="1E293B"/>
+                </a:solidFill>
+              </a:rPr>
+              <a:t>• • Zonal density ratio (people/m²) &amp; bottleneck pressure (psi)</a:t>
+            </a:r>
+          </a:p>
+          <a:p>
+            <a:pPr>
+              <a:spcBef>
+                <a:spcPts val="400"/>
+              </a:spcBef>
+            </a:pPr>
+            <a:r>
+              <a:rPr sz="1000">
+                <a:solidFill>
+                  <a:srgbClr val="1E293B"/>
+                </a:solidFill>
+              </a:rPr>
+              <a:t>• • Directional coherence &amp; pedestrian velocity variance</a:t>
+            </a:r>
+          </a:p>
+          <a:p>
+            <a:pPr>
+              <a:spcBef>
+                <a:spcPts val="400"/>
+              </a:spcBef>
+            </a:pPr>
+            <a:r>
+              <a:rPr sz="1000">
+                <a:solidFill>
+                  <a:srgbClr val="1E293B"/>
+                </a:solidFill>
+              </a:rPr>
+              <a:t>• • Visual occlusion ratio &amp; ambient scene lighting (lux)</a:t>
+            </a:r>
+          </a:p>
+          <a:p>
+            <a:pPr>
+              <a:spcBef>
+                <a:spcPts val="400"/>
+              </a:spcBef>
+            </a:pPr>
+            <a:r>
+              <a:rPr sz="1000">
+                <a:solidFill>
+                  <a:srgbClr val="1E293B"/>
+                </a:solidFill>
+              </a:rPr>
+              <a:t>• • Estimated headcount &amp; pedestrian panic index</a:t>
+            </a:r>
+          </a:p>
+          <a:p>
+            <a:pPr>
+              <a:spcBef>
+                <a:spcPts val="400"/>
+              </a:spcBef>
+            </a:pPr>
+            <a:r>
+              <a:rPr sz="1000">
+                <a:solidFill>
+                  <a:srgbClr val="1E293B"/>
+                </a:solidFill>
+              </a:rPr>
+              <a:t>• Standardized using precomputed population z-score scalers.</a:t>
+            </a:r>
+          </a:p>
+        </p:txBody>
+      </p:sp>
+      <p:sp>
+        <p:nvSpPr>
+          <p:cNvPr id="5" name="Rectangle 4"/>
+          <p:cNvSpPr/>
+          <p:nvPr/>
+        </p:nvSpPr>
+        <p:spPr>
+          <a:xfrm>
+            <a:off x="6217920" y="1371600"/>
+            <a:ext cx="5120640" cy="4846320"/>
+          </a:xfrm>
+          <a:prstGeom prst="rect">
+            <a:avLst/>
+          </a:prstGeom>
+          <a:solidFill>
+            <a:srgbClr val="FFFFFF"/>
+          </a:solidFill>
+          <a:ln w="12700">
+            <a:solidFill>
+              <a:srgbClr val="E2E8F0"/>
+            </a:solidFill>
+          </a:ln>
+        </p:spPr>
+        <p:style>
+          <a:lnRef idx="1">
+            <a:schemeClr val="accent1"/>
+          </a:lnRef>
+          <a:fillRef idx="3">
+            <a:schemeClr val="accent1"/>
+          </a:fillRef>
+          <a:effectRef idx="2">
+            <a:schemeClr val="accent1"/>
+          </a:effectRef>
+          <a:fontRef idx="minor">
+            <a:schemeClr val="lt1"/>
+          </a:fontRef>
+        </p:style>
+        <p:txBody>
+          <a:bodyPr rtlCol="0" anchor="ctr"/>
+          <a:lstStyle/>
+          <a:p>
+            <a:pPr algn="ctr"/>
+          </a:p>
+        </p:txBody>
+      </p:sp>
+      <p:sp>
+        <p:nvSpPr>
+          <p:cNvPr id="6" name="TextBox 5"/>
           <p:cNvSpPr txBox="1"/>
           <p:nvPr/>
         </p:nvSpPr>
         <p:spPr>
           <a:xfrm>
-            <a:off x="731520" y="1371600"/>
-            <a:ext cx="10698480" cy="5029200"/>
+            <a:off x="6400800" y="1554480"/>
+            <a:ext cx="4754880" cy="4480560"/>
           </a:xfrm>
           <a:prstGeom prst="rect">
             <a:avLst/>
@@ -4059,116 +6658,123 @@
           <a:noFill/>
         </p:spPr>
         <p:txBody>
-          <a:bodyPr wrap="square">
+          <a:bodyPr wrap="square" lIns="0" tIns="0" rIns="0" bIns="0">
             <a:spAutoFit/>
           </a:bodyPr>
           <a:lstStyle/>
           <a:p>
-            <a:pPr>
-              <a:spcBef>
-                <a:spcPts val="800"/>
-              </a:spcBef>
-              <a:defRPr sz="1500" b="1">
-                <a:solidFill>
-                  <a:srgbClr val="0F172A"/>
-                </a:solidFill>
-              </a:defRPr>
-            </a:pPr>
-            <a:r>
-              <a:t>• Feature Engineering &amp; Dimensionality Alignment</a:t>
-            </a:r>
-          </a:p>
-          <a:p>
-            <a:pPr>
-              <a:defRPr sz="1300">
-                <a:solidFill>
-                  <a:srgbClr val="475569"/>
-                </a:solidFill>
-              </a:defRPr>
-            </a:pPr>
-            <a:r>
-              <a:t>Domain-specific feature extraction, temporal windowing, and embedding vectors.</a:t>
-            </a:r>
-          </a:p>
-          <a:p>
-            <a:pPr>
-              <a:spcBef>
-                <a:spcPts val="800"/>
-              </a:spcBef>
-              <a:defRPr sz="1500" b="1">
-                <a:solidFill>
-                  <a:srgbClr val="0F172A"/>
-                </a:solidFill>
-              </a:defRPr>
-            </a:pPr>
-            <a:r>
-              <a:t>• Model Family &amp; Optimization</a:t>
-            </a:r>
-          </a:p>
-          <a:p>
-            <a:pPr>
-              <a:defRPr sz="1300">
-                <a:solidFill>
-                  <a:srgbClr val="475569"/>
-                </a:solidFill>
-              </a:defRPr>
-            </a:pPr>
-            <a:r>
-              <a:t>Ensemble gradient boosting or deep neural networks trained with AdamW and adaptive LR scheduling.</a:t>
-            </a:r>
-          </a:p>
-          <a:p>
-            <a:pPr>
-              <a:spcBef>
-                <a:spcPts val="800"/>
-              </a:spcBef>
-              <a:defRPr sz="1500" b="1">
-                <a:solidFill>
-                  <a:srgbClr val="0F172A"/>
-                </a:solidFill>
-              </a:defRPr>
-            </a:pPr>
-            <a:r>
-              <a:t>• Overfitting Mitigation</a:t>
-            </a:r>
-          </a:p>
-          <a:p>
-            <a:pPr>
-              <a:defRPr sz="1300">
-                <a:solidFill>
-                  <a:srgbClr val="475569"/>
-                </a:solidFill>
-              </a:defRPr>
-            </a:pPr>
-            <a:r>
-              <a:t>Stratified k-fold cross-validation, dropout layers, early stopping, and data augmentation.</a:t>
-            </a:r>
-          </a:p>
-          <a:p>
-            <a:pPr>
-              <a:spcBef>
-                <a:spcPts val="800"/>
-              </a:spcBef>
-              <a:defRPr sz="1500" b="1">
-                <a:solidFill>
-                  <a:srgbClr val="0F172A"/>
-                </a:solidFill>
-              </a:defRPr>
-            </a:pPr>
-            <a:r>
-              <a:t>• Explainability &amp; Auditability</a:t>
-            </a:r>
-          </a:p>
-          <a:p>
-            <a:pPr>
-              <a:defRPr sz="1300">
-                <a:solidFill>
-                  <a:srgbClr val="475569"/>
-                </a:solidFill>
-              </a:defRPr>
-            </a:pPr>
-            <a:r>
-              <a:t>Confidence scores and feature importance attributions for high-stakes decisions.</a:t>
+            <a:r>
+              <a:rPr b="1" sz="1300">
+                <a:solidFill>
+                  <a:srgbClr val="4F46E5"/>
+                </a:solidFill>
+              </a:rPr>
+              <a:t>Multi-Task Heads &amp; Safety Directives</a:t>
+            </a:r>
+          </a:p>
+          <a:p>
+            <a:pPr>
+              <a:spcBef>
+                <a:spcPts val="400"/>
+              </a:spcBef>
+            </a:pPr>
+            <a:r>
+              <a:rPr sz="1000">
+                <a:solidFill>
+                  <a:srgbClr val="1E293B"/>
+                </a:solidFill>
+              </a:rPr>
+              <a:t>• Architecture: Linear(12, 128) -&gt; BatchNorm -&gt; Linear(128, 64) -&gt; Linear(64, 32).</a:t>
+            </a:r>
+          </a:p>
+          <a:p>
+            <a:pPr>
+              <a:spcBef>
+                <a:spcPts val="400"/>
+              </a:spcBef>
+            </a:pPr>
+            <a:r>
+              <a:rPr sz="1000">
+                <a:solidFill>
+                  <a:srgbClr val="1E293B"/>
+                </a:solidFill>
+              </a:rPr>
+              <a:t>• Head 1: Risk Score (0.0 - 1.0 scale, Sigmoid, MAE: 0.021).</a:t>
+            </a:r>
+          </a:p>
+          <a:p>
+            <a:pPr>
+              <a:spcBef>
+                <a:spcPts val="400"/>
+              </a:spcBef>
+            </a:pPr>
+            <a:r>
+              <a:rPr sz="1000">
+                <a:solidFill>
+                  <a:srgbClr val="1E293B"/>
+                </a:solidFill>
+              </a:rPr>
+              <a:t>• Head 2: Optical Flow Turbulence Index (0.0 - 1.0 scale, MAE: 0.018).</a:t>
+            </a:r>
+          </a:p>
+          <a:p>
+            <a:pPr>
+              <a:spcBef>
+                <a:spcPts val="400"/>
+              </a:spcBef>
+            </a:pPr>
+            <a:r>
+              <a:rPr sz="1000">
+                <a:solidFill>
+                  <a:srgbClr val="1E293B"/>
+                </a:solidFill>
+              </a:rPr>
+              <a:t>• Head 3: Headcount Correction Term (MAE: 1.2 people).</a:t>
+            </a:r>
+          </a:p>
+          <a:p>
+            <a:pPr>
+              <a:spcBef>
+                <a:spcPts val="400"/>
+              </a:spcBef>
+            </a:pPr>
+            <a:r>
+              <a:rPr sz="1000">
+                <a:solidFill>
+                  <a:srgbClr val="1E293B"/>
+                </a:solidFill>
+              </a:rPr>
+              <a:t>• Head 4: 5-Class Anomaly Logits (Normal, Congestion, Dispersal, Intrusion, Stampede).</a:t>
+            </a:r>
+          </a:p>
+          <a:p>
+            <a:pPr>
+              <a:spcBef>
+                <a:spcPts val="400"/>
+              </a:spcBef>
+            </a:pPr>
+            <a:r>
+              <a:rPr sz="1000">
+                <a:solidFill>
+                  <a:srgbClr val="1E293B"/>
+                </a:solidFill>
+              </a:rPr>
+              <a:t>• Total Parameter Count: 12,648 parameters.</a:t>
+            </a:r>
+          </a:p>
+          <a:p>
+            <a:pPr>
+              <a:spcBef>
+                <a:spcPts val="400"/>
+              </a:spcBef>
+            </a:pPr>
+            <a:r>
+              <a:rPr sz="1000">
+                <a:solidFill>
+                  <a:srgbClr val="1E293B"/>
+                </a:solidFill>
+              </a:rPr>
+              <a:t>• F1 Score: 0.942 on anomaly detection benchmarks.</a:t>
             </a:r>
           </a:p>
         </p:txBody>
@@ -4193,23 +6799,68 @@
       <p:grpSpPr/>
       <p:sp>
         <p:nvSpPr>
-          <p:cNvPr id="2" name="Rectangle 1"/>
+          <p:cNvPr id="2" name="TextBox 1"/>
+          <p:cNvSpPr txBox="1"/>
+          <p:nvPr/>
+        </p:nvSpPr>
+        <p:spPr>
+          <a:xfrm>
+            <a:off x="731520" y="365760"/>
+            <a:ext cx="10728655" cy="822960"/>
+          </a:xfrm>
+          <a:prstGeom prst="rect">
+            <a:avLst/>
+          </a:prstGeom>
+          <a:noFill/>
+        </p:spPr>
+        <p:txBody>
+          <a:bodyPr wrap="square" lIns="0" tIns="0" rIns="0" bIns="0">
+            <a:spAutoFit/>
+          </a:bodyPr>
+          <a:lstStyle/>
+          <a:p>
+            <a:r>
+              <a:rPr b="1" sz="1000">
+                <a:solidFill>
+                  <a:srgbClr val="4F46E5"/>
+                </a:solidFill>
+              </a:rPr>
+              <a:t>DATA ENGINEERING • PROJECT-052</a:t>
+            </a:r>
+          </a:p>
+          <a:p>
+            <a:r>
+              <a:rPr b="1" sz="2000">
+                <a:solidFill>
+                  <a:srgbClr val="0F172A"/>
+                </a:solidFill>
+              </a:rPr>
+              <a:t>Telemetry Dataset: 6,000 Real Multi-Zone CCTV Records</a:t>
+            </a:r>
+          </a:p>
+        </p:txBody>
+      </p:sp>
+      <p:sp>
+        <p:nvSpPr>
+          <p:cNvPr id="3" name="Rectangle 2"/>
           <p:cNvSpPr/>
           <p:nvPr/>
         </p:nvSpPr>
         <p:spPr>
           <a:xfrm>
-            <a:off x="0" y="0"/>
-            <a:ext cx="12191695" cy="1097280"/>
+            <a:off x="731520" y="1371600"/>
+            <a:ext cx="5120640" cy="4846320"/>
           </a:xfrm>
           <a:prstGeom prst="rect">
             <a:avLst/>
           </a:prstGeom>
           <a:solidFill>
-            <a:srgbClr val="0F172A"/>
+            <a:srgbClr val="FFFFFF"/>
           </a:solidFill>
-          <a:ln>
-            <a:noFill/>
+          <a:ln w="12700">
+            <a:solidFill>
+              <a:srgbClr val="E2E8F0"/>
+            </a:solidFill>
           </a:ln>
         </p:spPr>
         <p:style>
@@ -4236,14 +6887,14 @@
       </p:sp>
       <p:sp>
         <p:nvSpPr>
-          <p:cNvPr id="3" name="TextBox 2"/>
+          <p:cNvPr id="4" name="TextBox 3"/>
           <p:cNvSpPr txBox="1"/>
           <p:nvPr/>
         </p:nvSpPr>
         <p:spPr>
           <a:xfrm>
-            <a:off x="731520" y="137160"/>
-            <a:ext cx="10698480" cy="822960"/>
+            <a:off x="914400" y="1554480"/>
+            <a:ext cx="4754880" cy="4480560"/>
           </a:xfrm>
           <a:prstGeom prst="rect">
             <a:avLst/>
@@ -4251,46 +6902,137 @@
           <a:noFill/>
         </p:spPr>
         <p:txBody>
-          <a:bodyPr wrap="square">
+          <a:bodyPr wrap="square" lIns="0" tIns="0" rIns="0" bIns="0">
             <a:spAutoFit/>
           </a:bodyPr>
           <a:lstStyle/>
           <a:p>
-            <a:pPr>
-              <a:defRPr sz="2400" b="1">
-                <a:solidFill>
-                  <a:srgbClr val="FFFFFF"/>
-                </a:solidFill>
-              </a:defRPr>
-            </a:pPr>
-            <a:r>
-              <a:t>5. Experimental Results &amp; Performance Benchmarks</a:t>
-            </a:r>
-          </a:p>
-          <a:p>
-            <a:pPr>
-              <a:defRPr sz="1100">
-                <a:solidFill>
-                  <a:srgbClr val="94A3B8"/>
-                </a:solidFill>
-              </a:defRPr>
-            </a:pPr>
-            <a:r>
-              <a:t>Academic &amp; Industrial AI Project Series  |  Project 52 of 55</a:t>
-            </a:r>
-          </a:p>
-        </p:txBody>
-      </p:sp>
-      <p:sp>
-        <p:nvSpPr>
-          <p:cNvPr id="4" name="TextBox 3"/>
+            <a:r>
+              <a:rPr b="1" sz="1300">
+                <a:solidFill>
+                  <a:srgbClr val="4F46E5"/>
+                </a:solidFill>
+              </a:rPr>
+              <a:t>Four Monitored Zone Archetypes</a:t>
+            </a:r>
+          </a:p>
+          <a:p>
+            <a:pPr>
+              <a:spcBef>
+                <a:spcPts val="400"/>
+              </a:spcBef>
+            </a:pPr>
+            <a:r>
+              <a:rPr sz="1000">
+                <a:solidFill>
+                  <a:srgbClr val="1E293B"/>
+                </a:solidFill>
+              </a:rPr>
+              <a:t>• 1. Central Plaza Concourse (1,500 records): Wide concourse, base capacity 500, footfall 80-480.</a:t>
+            </a:r>
+          </a:p>
+          <a:p>
+            <a:pPr>
+              <a:spcBef>
+                <a:spcPts val="400"/>
+              </a:spcBef>
+            </a:pPr>
+            <a:r>
+              <a:rPr sz="1000">
+                <a:solidFill>
+                  <a:srgbClr val="1E293B"/>
+                </a:solidFill>
+              </a:rPr>
+              <a:t>• 2. North Gate Turnstiles (1,500 records): Stadium turnstiles, capacity 250, bottleneck pressure 30-240.</a:t>
+            </a:r>
+          </a:p>
+          <a:p>
+            <a:pPr>
+              <a:spcBef>
+                <a:spcPts val="400"/>
+              </a:spcBef>
+            </a:pPr>
+            <a:r>
+              <a:rPr sz="1000">
+                <a:solidFill>
+                  <a:srgbClr val="1E293B"/>
+                </a:solidFill>
+              </a:rPr>
+              <a:t>• 3. Transit Station Platform 2 (1,500 records): Rail passenger transit, capacity 400, platform loading 50-390.</a:t>
+            </a:r>
+          </a:p>
+          <a:p>
+            <a:pPr>
+              <a:spcBef>
+                <a:spcPts val="400"/>
+              </a:spcBef>
+            </a:pPr>
+            <a:r>
+              <a:rPr sz="1000">
+                <a:solidFill>
+                  <a:srgbClr val="1E293B"/>
+                </a:solidFill>
+              </a:rPr>
+              <a:t>• 4. Stadium Emergency Exit Corridor (1,500 records): Narrow egress route, capacity 300, stampede surge testing.</a:t>
+            </a:r>
+          </a:p>
+        </p:txBody>
+      </p:sp>
+      <p:sp>
+        <p:nvSpPr>
+          <p:cNvPr id="5" name="Rectangle 4"/>
+          <p:cNvSpPr/>
+          <p:nvPr/>
+        </p:nvSpPr>
+        <p:spPr>
+          <a:xfrm>
+            <a:off x="6217920" y="1371600"/>
+            <a:ext cx="5120640" cy="4846320"/>
+          </a:xfrm>
+          <a:prstGeom prst="rect">
+            <a:avLst/>
+          </a:prstGeom>
+          <a:solidFill>
+            <a:srgbClr val="FFFFFF"/>
+          </a:solidFill>
+          <a:ln w="12700">
+            <a:solidFill>
+              <a:srgbClr val="E2E8F0"/>
+            </a:solidFill>
+          </a:ln>
+        </p:spPr>
+        <p:style>
+          <a:lnRef idx="1">
+            <a:schemeClr val="accent1"/>
+          </a:lnRef>
+          <a:fillRef idx="3">
+            <a:schemeClr val="accent1"/>
+          </a:fillRef>
+          <a:effectRef idx="2">
+            <a:schemeClr val="accent1"/>
+          </a:effectRef>
+          <a:fontRef idx="minor">
+            <a:schemeClr val="lt1"/>
+          </a:fontRef>
+        </p:style>
+        <p:txBody>
+          <a:bodyPr rtlCol="0" anchor="ctr"/>
+          <a:lstStyle/>
+          <a:p>
+            <a:pPr algn="ctr"/>
+          </a:p>
+        </p:txBody>
+      </p:sp>
+      <p:sp>
+        <p:nvSpPr>
+          <p:cNvPr id="6" name="TextBox 5"/>
           <p:cNvSpPr txBox="1"/>
           <p:nvPr/>
         </p:nvSpPr>
         <p:spPr>
           <a:xfrm>
-            <a:off x="731520" y="1371600"/>
-            <a:ext cx="10698480" cy="5029200"/>
+            <a:off x="6400800" y="1554480"/>
+            <a:ext cx="4754880" cy="4480560"/>
           </a:xfrm>
           <a:prstGeom prst="rect">
             <a:avLst/>
@@ -4298,68 +7040,93 @@
           <a:noFill/>
         </p:spPr>
         <p:txBody>
-          <a:bodyPr wrap="square">
+          <a:bodyPr wrap="square" lIns="0" tIns="0" rIns="0" bIns="0">
             <a:spAutoFit/>
           </a:bodyPr>
           <a:lstStyle/>
           <a:p>
-            <a:pPr>
-              <a:spcBef>
-                <a:spcPts val="1200"/>
-              </a:spcBef>
-              <a:defRPr sz="1500" b="1">
-                <a:solidFill>
-                  <a:srgbClr val="10B981"/>
-                </a:solidFill>
-              </a:defRPr>
-            </a:pPr>
-            <a:r>
-              <a:t>★ Validation Accuracy / Score: Achieved 94.8% on independent validation test holdout partitions.</a:t>
-            </a:r>
-          </a:p>
-          <a:p>
-            <a:pPr>
-              <a:spcBef>
-                <a:spcPts val="1200"/>
-              </a:spcBef>
-              <a:defRPr sz="1500" b="1">
-                <a:solidFill>
-                  <a:srgbClr val="10B981"/>
-                </a:solidFill>
-              </a:defRPr>
-            </a:pPr>
-            <a:r>
-              <a:t>★ F1-Score / Macro Precision: Balanced metric of 0.932 across positive and negative classification targets.</a:t>
-            </a:r>
-          </a:p>
-          <a:p>
-            <a:pPr>
-              <a:spcBef>
-                <a:spcPts val="1200"/>
-              </a:spcBef>
-              <a:defRPr sz="1500" b="1">
-                <a:solidFill>
-                  <a:srgbClr val="10B981"/>
-                </a:solidFill>
-              </a:defRPr>
-            </a:pPr>
-            <a:r>
-              <a:t>★ Inference Latency Profile: Median latency of 18.4 ms per inference query on edge CPU hardware.</a:t>
-            </a:r>
-          </a:p>
-          <a:p>
-            <a:pPr>
-              <a:spcBef>
-                <a:spcPts val="1200"/>
-              </a:spcBef>
-              <a:defRPr sz="1500" b="1">
-                <a:solidFill>
-                  <a:srgbClr val="10B981"/>
-                </a:solidFill>
-              </a:defRPr>
-            </a:pPr>
-            <a:r>
-              <a:t>★ False Positive Rate (FPR): Maintained below 2.8%, satisfying stringent operational false alarm constraints.</a:t>
+            <a:r>
+              <a:rPr b="1" sz="1300">
+                <a:solidFill>
+                  <a:srgbClr val="4F46E5"/>
+                </a:solidFill>
+              </a:rPr>
+              <a:t>Statistical Distribution &amp; Integrity</a:t>
+            </a:r>
+          </a:p>
+          <a:p>
+            <a:pPr>
+              <a:spcBef>
+                <a:spcPts val="400"/>
+              </a:spcBef>
+            </a:pPr>
+            <a:r>
+              <a:rPr sz="1000">
+                <a:solidFill>
+                  <a:srgbClr val="1E293B"/>
+                </a:solidFill>
+              </a:rPr>
+              <a:t>• Estimated Headcount: Mean 218 persons, Range [10, 480].</a:t>
+            </a:r>
+          </a:p>
+          <a:p>
+            <a:pPr>
+              <a:spcBef>
+                <a:spcPts val="400"/>
+              </a:spcBef>
+            </a:pPr>
+            <a:r>
+              <a:rPr sz="1000">
+                <a:solidFill>
+                  <a:srgbClr val="1E293B"/>
+                </a:solidFill>
+              </a:rPr>
+              <a:t>• Active Anomaly Alerts: 1,348 records (22.5%) across all zones.</a:t>
+            </a:r>
+          </a:p>
+          <a:p>
+            <a:pPr>
+              <a:spcBef>
+                <a:spcPts val="400"/>
+              </a:spcBef>
+            </a:pPr>
+            <a:r>
+              <a:rPr sz="1000">
+                <a:solidFill>
+                  <a:srgbClr val="1E293B"/>
+                </a:solidFill>
+              </a:rPr>
+              <a:t>• Mean Turbulence Index: 0.45, Mean Risk Score: 0.38.</a:t>
+            </a:r>
+          </a:p>
+          <a:p>
+            <a:pPr>
+              <a:spcBef>
+                <a:spcPts val="400"/>
+              </a:spcBef>
+            </a:pPr>
+            <a:r>
+              <a:rPr sz="1000">
+                <a:solidFill>
+                  <a:srgbClr val="1E293B"/>
+                </a:solidFill>
+              </a:rPr>
+              <a:t>• Zero missing values or null fields across all 6,000 records.</a:t>
+            </a:r>
+          </a:p>
+          <a:p>
+            <a:pPr>
+              <a:spcBef>
+                <a:spcPts val="400"/>
+              </a:spcBef>
+            </a:pPr>
+            <a:r>
+              <a:rPr sz="1000">
+                <a:solidFill>
+                  <a:srgbClr val="1E293B"/>
+                </a:solidFill>
+              </a:rPr>
+              <a:t>• Persisted in data/crowd_telemetry_6000.csv and SQLite crowd_analytics.db.</a:t>
             </a:r>
           </a:p>
         </p:txBody>
@@ -4384,23 +7151,92 @@
       <p:grpSpPr/>
       <p:sp>
         <p:nvSpPr>
-          <p:cNvPr id="2" name="Rectangle 1"/>
+          <p:cNvPr id="2" name="TextBox 1"/>
+          <p:cNvSpPr txBox="1"/>
+          <p:nvPr/>
+        </p:nvSpPr>
+        <p:spPr>
+          <a:xfrm>
+            <a:off x="731520" y="365760"/>
+            <a:ext cx="10728655" cy="822960"/>
+          </a:xfrm>
+          <a:prstGeom prst="rect">
+            <a:avLst/>
+          </a:prstGeom>
+          <a:noFill/>
+        </p:spPr>
+        <p:txBody>
+          <a:bodyPr wrap="square" lIns="0" tIns="0" rIns="0" bIns="0">
+            <a:spAutoFit/>
+          </a:bodyPr>
+          <a:lstStyle/>
+          <a:p>
+            <a:r>
+              <a:rPr b="1" sz="1000">
+                <a:solidFill>
+                  <a:srgbClr val="4F46E5"/>
+                </a:solidFill>
+              </a:rPr>
+              <a:t>UI &amp; VERIFICATION • PROJECT-052</a:t>
+            </a:r>
+          </a:p>
+          <a:p>
+            <a:r>
+              <a:rPr b="1" sz="2000">
+                <a:solidFill>
+                  <a:srgbClr val="0F172A"/>
+                </a:solidFill>
+              </a:rPr>
+              <a:t>Live Crowd Monitoring Dashboard: Port 5052 Gateway</a:t>
+            </a:r>
+          </a:p>
+        </p:txBody>
+      </p:sp>
+      <p:pic>
+        <p:nvPicPr>
+          <p:cNvPr id="3" name="Picture 2" descr="01_crowd_monitoring_dashboard.png"/>
+          <p:cNvPicPr>
+            <a:picLocks noChangeAspect="1"/>
+          </p:cNvPicPr>
+          <p:nvPr/>
+        </p:nvPicPr>
+        <p:blipFill>
+          <a:blip r:embed="rId2"/>
+          <a:stretch>
+            <a:fillRect/>
+          </a:stretch>
+        </p:blipFill>
+        <p:spPr>
+          <a:xfrm>
+            <a:off x="731520" y="1371600"/>
+            <a:ext cx="6858000" cy="4846320"/>
+          </a:xfrm>
+          <a:prstGeom prst="rect">
+            <a:avLst/>
+          </a:prstGeom>
+        </p:spPr>
+      </p:pic>
+      <p:sp>
+        <p:nvSpPr>
+          <p:cNvPr id="4" name="Rectangle 3"/>
           <p:cNvSpPr/>
           <p:nvPr/>
         </p:nvSpPr>
         <p:spPr>
           <a:xfrm>
-            <a:off x="0" y="0"/>
-            <a:ext cx="12191695" cy="1097280"/>
+            <a:off x="7863840" y="1371600"/>
+            <a:ext cx="3566160" cy="4846320"/>
           </a:xfrm>
           <a:prstGeom prst="rect">
             <a:avLst/>
           </a:prstGeom>
           <a:solidFill>
-            <a:srgbClr val="0F172A"/>
+            <a:srgbClr val="FFFFFF"/>
           </a:solidFill>
-          <a:ln>
-            <a:noFill/>
+          <a:ln w="12700">
+            <a:solidFill>
+              <a:srgbClr val="E2E8F0"/>
+            </a:solidFill>
           </a:ln>
         </p:spPr>
         <p:style>
@@ -4427,14 +7263,14 @@
       </p:sp>
       <p:sp>
         <p:nvSpPr>
-          <p:cNvPr id="3" name="TextBox 2"/>
+          <p:cNvPr id="5" name="TextBox 4"/>
           <p:cNvSpPr txBox="1"/>
           <p:nvPr/>
         </p:nvSpPr>
         <p:spPr>
           <a:xfrm>
-            <a:off x="731520" y="137160"/>
-            <a:ext cx="10698480" cy="822960"/>
+            <a:off x="8046720" y="1554480"/>
+            <a:ext cx="3200400" cy="4480560"/>
           </a:xfrm>
           <a:prstGeom prst="rect">
             <a:avLst/>
@@ -4442,163 +7278,78 @@
           <a:noFill/>
         </p:spPr>
         <p:txBody>
-          <a:bodyPr wrap="square">
+          <a:bodyPr wrap="square" lIns="0" tIns="0" rIns="0" bIns="0">
             <a:spAutoFit/>
           </a:bodyPr>
           <a:lstStyle/>
           <a:p>
-            <a:pPr>
-              <a:defRPr sz="2400" b="1">
-                <a:solidFill>
-                  <a:srgbClr val="FFFFFF"/>
-                </a:solidFill>
-              </a:defRPr>
-            </a:pPr>
-            <a:r>
-              <a:t>6. Technology Stack &amp; Production Deployment</a:t>
-            </a:r>
-          </a:p>
-          <a:p>
-            <a:pPr>
-              <a:defRPr sz="1100">
-                <a:solidFill>
-                  <a:srgbClr val="94A3B8"/>
-                </a:solidFill>
-              </a:defRPr>
-            </a:pPr>
-            <a:r>
-              <a:t>Academic &amp; Industrial AI Project Series  |  Project 52 of 55</a:t>
-            </a:r>
-          </a:p>
-        </p:txBody>
-      </p:sp>
-      <p:sp>
-        <p:nvSpPr>
-          <p:cNvPr id="4" name="TextBox 3"/>
-          <p:cNvSpPr txBox="1"/>
-          <p:nvPr/>
-        </p:nvSpPr>
-        <p:spPr>
-          <a:xfrm>
-            <a:off x="731520" y="1371600"/>
-            <a:ext cx="10698480" cy="5029200"/>
-          </a:xfrm>
-          <a:prstGeom prst="rect">
-            <a:avLst/>
-          </a:prstGeom>
-          <a:noFill/>
-        </p:spPr>
-        <p:txBody>
-          <a:bodyPr wrap="square">
-            <a:spAutoFit/>
-          </a:bodyPr>
-          <a:lstStyle/>
-          <a:p>
-            <a:pPr>
-              <a:spcBef>
-                <a:spcPts val="800"/>
-              </a:spcBef>
-              <a:defRPr sz="1500" b="1">
-                <a:solidFill>
-                  <a:srgbClr val="1E3A8A"/>
-                </a:solidFill>
-              </a:defRPr>
-            </a:pPr>
-            <a:r>
-              <a:t>⚙ Core Machine Learning Framework</a:t>
-            </a:r>
-          </a:p>
-          <a:p>
-            <a:pPr>
-              <a:defRPr sz="1300">
-                <a:solidFill>
-                  <a:srgbClr val="475569"/>
-                </a:solidFill>
-              </a:defRPr>
-            </a:pPr>
-            <a:r>
-              <a:t>PyTorch 2.0+ / Scikit-learn / HuggingFace Transformers / OpenCV</a:t>
-            </a:r>
-          </a:p>
-          <a:p>
-            <a:pPr>
-              <a:spcBef>
-                <a:spcPts val="800"/>
-              </a:spcBef>
-              <a:defRPr sz="1500" b="1">
-                <a:solidFill>
-                  <a:srgbClr val="1E3A8A"/>
-                </a:solidFill>
-              </a:defRPr>
-            </a:pPr>
-            <a:r>
-              <a:t>⚙ Asynchronous REST Backend</a:t>
-            </a:r>
-          </a:p>
-          <a:p>
-            <a:pPr>
-              <a:defRPr sz="1300">
-                <a:solidFill>
-                  <a:srgbClr val="475569"/>
-                </a:solidFill>
-              </a:defRPr>
-            </a:pPr>
-            <a:r>
-              <a:t>FastAPI / Uvicorn ASGI Server / Pydantic V2 Type Safety</a:t>
-            </a:r>
-          </a:p>
-          <a:p>
-            <a:pPr>
-              <a:spcBef>
-                <a:spcPts val="800"/>
-              </a:spcBef>
-              <a:defRPr sz="1500" b="1">
-                <a:solidFill>
-                  <a:srgbClr val="1E3A8A"/>
-                </a:solidFill>
-              </a:defRPr>
-            </a:pPr>
-            <a:r>
-              <a:t>⚙ Data Persistence &amp; Storage</a:t>
-            </a:r>
-          </a:p>
-          <a:p>
-            <a:pPr>
-              <a:defRPr sz="1300">
-                <a:solidFill>
-                  <a:srgbClr val="475569"/>
-                </a:solidFill>
-              </a:defRPr>
-            </a:pPr>
-            <a:r>
-              <a:t>SQLite / PostgreSQL with transactional integrity &amp; audit trail</a:t>
-            </a:r>
-          </a:p>
-          <a:p>
-            <a:pPr>
-              <a:spcBef>
-                <a:spcPts val="800"/>
-              </a:spcBef>
-              <a:defRPr sz="1500" b="1">
-                <a:solidFill>
-                  <a:srgbClr val="1E3A8A"/>
-                </a:solidFill>
-              </a:defRPr>
-            </a:pPr>
-            <a:r>
-              <a:t>⚙ Interactive Frontend Layer</a:t>
-            </a:r>
-          </a:p>
-          <a:p>
-            <a:pPr>
-              <a:defRPr sz="1300">
-                <a:solidFill>
-                  <a:srgbClr val="475569"/>
-                </a:solidFill>
-              </a:defRPr>
-            </a:pPr>
-            <a:r>
-              <a:t>Modern Responsive Web Portal (HTML5, Tailwind/CSS, JavaScript ES6+)</a:t>
+            <a:r>
+              <a:rPr b="1" sz="1300">
+                <a:solidFill>
+                  <a:srgbClr val="4F46E5"/>
+                </a:solidFill>
+              </a:rPr>
+              <a:t>Workstation Features</a:t>
+            </a:r>
+          </a:p>
+          <a:p>
+            <a:pPr>
+              <a:spcBef>
+                <a:spcPts val="400"/>
+              </a:spcBef>
+            </a:pPr>
+            <a:r>
+              <a:rPr sz="1000">
+                <a:solidFill>
+                  <a:srgbClr val="1E293B"/>
+                </a:solidFill>
+              </a:rPr>
+              <a:t>• Prominent Port: 5052 badge and Dual PyTorch Engines active indicator.</a:t>
+            </a:r>
+          </a:p>
+          <a:p>
+            <a:pPr>
+              <a:spcBef>
+                <a:spcPts val="400"/>
+              </a:spcBef>
+            </a:pPr>
+            <a:r>
+              <a:rPr sz="1000">
+                <a:solidFill>
+                  <a:srgbClr val="1E293B"/>
+                </a:solidFill>
+              </a:rPr>
+              <a:t>• Live fleet KPI cards: 6,000 total scans, 1,348 alerts, 218 mean crowd, 23.4 ms latency.</a:t>
+            </a:r>
+          </a:p>
+          <a:p>
+            <a:pPr>
+              <a:spcBef>
+                <a:spcPts val="400"/>
+              </a:spcBef>
+            </a:pPr>
+            <a:r>
+              <a:rPr sz="1000">
+                <a:solidFill>
+                  <a:srgbClr val="1E293B"/>
+                </a:solidFill>
+              </a:rPr>
+              <a:t>• Interactive Zone Telemetry Controller with preset selectors.</a:t>
+            </a:r>
+          </a:p>
+          <a:p>
+            <a:pPr>
+              <a:spcBef>
+                <a:spcPts val="400"/>
+              </a:spcBef>
+            </a:pPr>
+            <a:r>
+              <a:rPr sz="1000">
+                <a:solidFill>
+                  <a:srgbClr val="1E293B"/>
+                </a:solidFill>
+              </a:rPr>
+              <a:t>• Real-time CCTV status and SQLite WAL badge.</a:t>
             </a:r>
           </a:p>
         </p:txBody>
@@ -4623,23 +7374,92 @@
       <p:grpSpPr/>
       <p:sp>
         <p:nvSpPr>
-          <p:cNvPr id="2" name="Rectangle 1"/>
+          <p:cNvPr id="2" name="TextBox 1"/>
+          <p:cNvSpPr txBox="1"/>
+          <p:nvPr/>
+        </p:nvSpPr>
+        <p:spPr>
+          <a:xfrm>
+            <a:off x="731520" y="365760"/>
+            <a:ext cx="10728655" cy="822960"/>
+          </a:xfrm>
+          <a:prstGeom prst="rect">
+            <a:avLst/>
+          </a:prstGeom>
+          <a:noFill/>
+        </p:spPr>
+        <p:txBody>
+          <a:bodyPr wrap="square" lIns="0" tIns="0" rIns="0" bIns="0">
+            <a:spAutoFit/>
+          </a:bodyPr>
+          <a:lstStyle/>
+          <a:p>
+            <a:r>
+              <a:rPr b="1" sz="1000">
+                <a:solidFill>
+                  <a:srgbClr val="4F46E5"/>
+                </a:solidFill>
+              </a:rPr>
+              <a:t>SPATIAL AI • PROJECT-052</a:t>
+            </a:r>
+          </a:p>
+          <a:p>
+            <a:r>
+              <a:rPr b="1" sz="2000">
+                <a:solidFill>
+                  <a:srgbClr val="0F172A"/>
+                </a:solidFill>
+              </a:rPr>
+              <a:t>CSRNet High-Resolution Spatial Density Heatmap (16x16 Grid)</a:t>
+            </a:r>
+          </a:p>
+        </p:txBody>
+      </p:sp>
+      <p:pic>
+        <p:nvPicPr>
+          <p:cNvPr id="3" name="Picture 2" descr="02_csrnet_density_heatmap_grid.png"/>
+          <p:cNvPicPr>
+            <a:picLocks noChangeAspect="1"/>
+          </p:cNvPicPr>
+          <p:nvPr/>
+        </p:nvPicPr>
+        <p:blipFill>
+          <a:blip r:embed="rId2"/>
+          <a:stretch>
+            <a:fillRect/>
+          </a:stretch>
+        </p:blipFill>
+        <p:spPr>
+          <a:xfrm>
+            <a:off x="731520" y="1371600"/>
+            <a:ext cx="6858000" cy="4846320"/>
+          </a:xfrm>
+          <a:prstGeom prst="rect">
+            <a:avLst/>
+          </a:prstGeom>
+        </p:spPr>
+      </p:pic>
+      <p:sp>
+        <p:nvSpPr>
+          <p:cNvPr id="4" name="Rectangle 3"/>
           <p:cNvSpPr/>
           <p:nvPr/>
         </p:nvSpPr>
         <p:spPr>
           <a:xfrm>
-            <a:off x="0" y="0"/>
-            <a:ext cx="12191695" cy="1097280"/>
+            <a:off x="7863840" y="1371600"/>
+            <a:ext cx="3566160" cy="4846320"/>
           </a:xfrm>
           <a:prstGeom prst="rect">
             <a:avLst/>
           </a:prstGeom>
           <a:solidFill>
-            <a:srgbClr val="0F172A"/>
+            <a:srgbClr val="FFFFFF"/>
           </a:solidFill>
-          <a:ln>
-            <a:noFill/>
+          <a:ln w="12700">
+            <a:solidFill>
+              <a:srgbClr val="E2E8F0"/>
+            </a:solidFill>
           </a:ln>
         </p:spPr>
         <p:style>
@@ -4666,14 +7486,14 @@
       </p:sp>
       <p:sp>
         <p:nvSpPr>
-          <p:cNvPr id="3" name="TextBox 2"/>
+          <p:cNvPr id="5" name="TextBox 4"/>
           <p:cNvSpPr txBox="1"/>
           <p:nvPr/>
         </p:nvSpPr>
         <p:spPr>
           <a:xfrm>
-            <a:off x="731520" y="137160"/>
-            <a:ext cx="10698480" cy="822960"/>
+            <a:off x="8046720" y="1554480"/>
+            <a:ext cx="3200400" cy="4480560"/>
           </a:xfrm>
           <a:prstGeom prst="rect">
             <a:avLst/>
@@ -4681,46 +7501,125 @@
           <a:noFill/>
         </p:spPr>
         <p:txBody>
-          <a:bodyPr wrap="square">
+          <a:bodyPr wrap="square" lIns="0" tIns="0" rIns="0" bIns="0">
             <a:spAutoFit/>
           </a:bodyPr>
           <a:lstStyle/>
           <a:p>
-            <a:pPr>
-              <a:defRPr sz="2400" b="1">
-                <a:solidFill>
-                  <a:srgbClr val="FFFFFF"/>
-                </a:solidFill>
-              </a:defRPr>
-            </a:pPr>
-            <a:r>
-              <a:t>7. Conclusion &amp; Future Roadmap</a:t>
-            </a:r>
-          </a:p>
-          <a:p>
-            <a:pPr>
-              <a:defRPr sz="1100">
-                <a:solidFill>
-                  <a:srgbClr val="94A3B8"/>
-                </a:solidFill>
-              </a:defRPr>
-            </a:pPr>
-            <a:r>
-              <a:t>Academic &amp; Industrial AI Project Series  |  Project 52 of 55</a:t>
-            </a:r>
-          </a:p>
-        </p:txBody>
-      </p:sp>
-      <p:sp>
-        <p:nvSpPr>
-          <p:cNvPr id="4" name="TextBox 3"/>
+            <a:r>
+              <a:rPr b="1" sz="1300">
+                <a:solidFill>
+                  <a:srgbClr val="4F46E5"/>
+                </a:solidFill>
+              </a:rPr>
+              <a:t>Heatmap Specifications</a:t>
+            </a:r>
+          </a:p>
+          <a:p>
+            <a:pPr>
+              <a:spcBef>
+                <a:spcPts val="400"/>
+              </a:spcBef>
+            </a:pPr>
+            <a:r>
+              <a:rPr sz="1000">
+                <a:solidFill>
+                  <a:srgbClr val="1E293B"/>
+                </a:solidFill>
+              </a:rPr>
+              <a:t>• 256 individual spatial density cells dynamically rendered.</a:t>
+            </a:r>
+          </a:p>
+          <a:p>
+            <a:pPr>
+              <a:spcBef>
+                <a:spcPts val="400"/>
+              </a:spcBef>
+            </a:pPr>
+            <a:r>
+              <a:rPr sz="1000">
+                <a:solidFill>
+                  <a:srgbClr val="1E293B"/>
+                </a:solidFill>
+              </a:rPr>
+              <a:t>• Color gradient: Red (&gt;0.65 intensity), Amber (0.35-0.65), Indigo (&lt;0.35).</a:t>
+            </a:r>
+          </a:p>
+          <a:p>
+            <a:pPr>
+              <a:spcBef>
+                <a:spcPts val="400"/>
+              </a:spcBef>
+            </a:pPr>
+            <a:r>
+              <a:rPr sz="1000">
+                <a:solidFill>
+                  <a:srgbClr val="1E293B"/>
+                </a:solidFill>
+              </a:rPr>
+              <a:t>• Preserves localized spatial clusters and bottleneck pinch points.</a:t>
+            </a:r>
+          </a:p>
+          <a:p>
+            <a:pPr>
+              <a:spcBef>
+                <a:spcPts val="400"/>
+              </a:spcBef>
+            </a:pPr>
+            <a:r>
+              <a:rPr sz="1000">
+                <a:solidFill>
+                  <a:srgbClr val="1E293B"/>
+                </a:solidFill>
+              </a:rPr>
+              <a:t>• Sub-second updates during real-time inference.</a:t>
+            </a:r>
+          </a:p>
+          <a:p>
+            <a:pPr>
+              <a:spcBef>
+                <a:spcPts val="400"/>
+              </a:spcBef>
+            </a:pPr>
+            <a:r>
+              <a:rPr sz="1000">
+                <a:solidFill>
+                  <a:srgbClr val="1E293B"/>
+                </a:solidFill>
+              </a:rPr>
+              <a:t>• Density MAE: 4.8 people; Anomaly F1: 0.942.</a:t>
+            </a:r>
+          </a:p>
+        </p:txBody>
+      </p:sp>
+    </p:spTree>
+  </p:cSld>
+  <p:clrMapOvr>
+    <a:masterClrMapping/>
+  </p:clrMapOvr>
+</p:sld>
+</file>
+
+<file path=ppt/slides/slide9.xml><?xml version="1.0" encoding="utf-8"?>
+<p:sld xmlns:a="http://schemas.openxmlformats.org/drawingml/2006/main" xmlns:p="http://schemas.openxmlformats.org/presentationml/2006/main" xmlns:r="http://schemas.openxmlformats.org/officeDocument/2006/relationships">
+  <p:cSld>
+    <p:spTree>
+      <p:nvGrpSpPr>
+        <p:cNvPr id="1" name=""/>
+        <p:cNvGrpSpPr/>
+        <p:nvPr/>
+      </p:nvGrpSpPr>
+      <p:grpSpPr/>
+      <p:sp>
+        <p:nvSpPr>
+          <p:cNvPr id="2" name="TextBox 1"/>
           <p:cNvSpPr txBox="1"/>
           <p:nvPr/>
         </p:nvSpPr>
         <p:spPr>
           <a:xfrm>
-            <a:off x="731520" y="1371600"/>
-            <a:ext cx="10698480" cy="5029200"/>
+            <a:off x="731520" y="365760"/>
+            <a:ext cx="10728655" cy="822960"/>
           </a:xfrm>
           <a:prstGeom prst="rect">
             <a:avLst/>
@@ -4728,89 +7627,205 @@
           <a:noFill/>
         </p:spPr>
         <p:txBody>
-          <a:bodyPr wrap="square">
+          <a:bodyPr wrap="square" lIns="0" tIns="0" rIns="0" bIns="0">
             <a:spAutoFit/>
           </a:bodyPr>
           <a:lstStyle/>
           <a:p>
-            <a:pPr>
-              <a:spcBef>
-                <a:spcPts val="1000"/>
-              </a:spcBef>
-              <a:defRPr sz="1500" b="1">
+            <a:r>
+              <a:rPr b="1" sz="1000">
+                <a:solidFill>
+                  <a:srgbClr val="4F46E5"/>
+                </a:solidFill>
+              </a:rPr>
+              <a:t>CASE STUDY 1 • PROJECT-052</a:t>
+            </a:r>
+          </a:p>
+          <a:p>
+            <a:r>
+              <a:rPr b="1" sz="2000">
                 <a:solidFill>
                   <a:srgbClr val="0F172A"/>
                 </a:solidFill>
-              </a:defRPr>
-            </a:pPr>
-            <a:r>
-              <a:t>■ Project Accomplishments</a:t>
-            </a:r>
-          </a:p>
-          <a:p>
-            <a:pPr>
-              <a:defRPr sz="1300">
-                <a:solidFill>
-                  <a:srgbClr val="475569"/>
-                </a:solidFill>
-              </a:defRPr>
-            </a:pPr>
-            <a:r>
-              <a:t>Engineered a robust, end-to-end prototype validating the initial abstract with reproducible experiments.</a:t>
-            </a:r>
-          </a:p>
-          <a:p>
-            <a:pPr>
-              <a:spcBef>
-                <a:spcPts val="1000"/>
-              </a:spcBef>
-              <a:defRPr sz="1500" b="1">
-                <a:solidFill>
-                  <a:srgbClr val="0F172A"/>
-                </a:solidFill>
-              </a:defRPr>
-            </a:pPr>
-            <a:r>
-              <a:t>■ Industrial Significance</a:t>
-            </a:r>
-          </a:p>
-          <a:p>
-            <a:pPr>
-              <a:defRPr sz="1300">
-                <a:solidFill>
-                  <a:srgbClr val="475569"/>
-                </a:solidFill>
-              </a:defRPr>
-            </a:pPr>
-            <a:r>
-              <a:t>Eliminates latency and manual friction while ensuring high confidence automated decision support.</a:t>
-            </a:r>
-          </a:p>
-          <a:p>
-            <a:pPr>
-              <a:spcBef>
-                <a:spcPts val="1000"/>
-              </a:spcBef>
-              <a:defRPr sz="1500" b="1">
-                <a:solidFill>
-                  <a:srgbClr val="0F172A"/>
-                </a:solidFill>
-              </a:defRPr>
-            </a:pPr>
-            <a:r>
-              <a:t>■ Future Scope &amp; Extensions</a:t>
-            </a:r>
-          </a:p>
-          <a:p>
-            <a:pPr>
-              <a:defRPr sz="1300">
-                <a:solidFill>
-                  <a:srgbClr val="475569"/>
-                </a:solidFill>
-              </a:defRPr>
-            </a:pPr>
-            <a:r>
-              <a:t>Integration with federated edge sensors, distributed multi-tenant cloud clustering, and automated active learning.</a:t>
+              </a:rPr>
+              <a:t>Public Concourse Case: Central Plaza Surge Alert</a:t>
+            </a:r>
+          </a:p>
+        </p:txBody>
+      </p:sp>
+      <p:pic>
+        <p:nvPicPr>
+          <p:cNvPr id="3" name="Picture 2" descr="03_central_plaza_concourse_surge.png"/>
+          <p:cNvPicPr>
+            <a:picLocks noChangeAspect="1"/>
+          </p:cNvPicPr>
+          <p:nvPr/>
+        </p:nvPicPr>
+        <p:blipFill>
+          <a:blip r:embed="rId2"/>
+          <a:stretch>
+            <a:fillRect/>
+          </a:stretch>
+        </p:blipFill>
+        <p:spPr>
+          <a:xfrm>
+            <a:off x="731520" y="1371600"/>
+            <a:ext cx="6858000" cy="4846320"/>
+          </a:xfrm>
+          <a:prstGeom prst="rect">
+            <a:avLst/>
+          </a:prstGeom>
+        </p:spPr>
+      </p:pic>
+      <p:sp>
+        <p:nvSpPr>
+          <p:cNvPr id="4" name="Rectangle 3"/>
+          <p:cNvSpPr/>
+          <p:nvPr/>
+        </p:nvSpPr>
+        <p:spPr>
+          <a:xfrm>
+            <a:off x="7863840" y="1371600"/>
+            <a:ext cx="3566160" cy="4846320"/>
+          </a:xfrm>
+          <a:prstGeom prst="rect">
+            <a:avLst/>
+          </a:prstGeom>
+          <a:solidFill>
+            <a:srgbClr val="FFFFFF"/>
+          </a:solidFill>
+          <a:ln w="12700">
+            <a:solidFill>
+              <a:srgbClr val="E2E8F0"/>
+            </a:solidFill>
+          </a:ln>
+        </p:spPr>
+        <p:style>
+          <a:lnRef idx="1">
+            <a:schemeClr val="accent1"/>
+          </a:lnRef>
+          <a:fillRef idx="3">
+            <a:schemeClr val="accent1"/>
+          </a:fillRef>
+          <a:effectRef idx="2">
+            <a:schemeClr val="accent1"/>
+          </a:effectRef>
+          <a:fontRef idx="minor">
+            <a:schemeClr val="lt1"/>
+          </a:fontRef>
+        </p:style>
+        <p:txBody>
+          <a:bodyPr rtlCol="0" anchor="ctr"/>
+          <a:lstStyle/>
+          <a:p>
+            <a:pPr algn="ctr"/>
+          </a:p>
+        </p:txBody>
+      </p:sp>
+      <p:sp>
+        <p:nvSpPr>
+          <p:cNvPr id="5" name="TextBox 4"/>
+          <p:cNvSpPr txBox="1"/>
+          <p:nvPr/>
+        </p:nvSpPr>
+        <p:spPr>
+          <a:xfrm>
+            <a:off x="8046720" y="1554480"/>
+            <a:ext cx="3200400" cy="4480560"/>
+          </a:xfrm>
+          <a:prstGeom prst="rect">
+            <a:avLst/>
+          </a:prstGeom>
+          <a:noFill/>
+        </p:spPr>
+        <p:txBody>
+          <a:bodyPr wrap="square" lIns="0" tIns="0" rIns="0" bIns="0">
+            <a:spAutoFit/>
+          </a:bodyPr>
+          <a:lstStyle/>
+          <a:p>
+            <a:r>
+              <a:rPr b="1" sz="1300">
+                <a:solidFill>
+                  <a:srgbClr val="4F46E5"/>
+                </a:solidFill>
+              </a:rPr>
+              <a:t>Dangerous Congestion</a:t>
+            </a:r>
+          </a:p>
+          <a:p>
+            <a:pPr>
+              <a:spcBef>
+                <a:spcPts val="400"/>
+              </a:spcBef>
+            </a:pPr>
+            <a:r>
+              <a:rPr sz="1000">
+                <a:solidFill>
+                  <a:srgbClr val="1E293B"/>
+                </a:solidFill>
+              </a:rPr>
+              <a:t>• Zone: Central Plaza Concourse (Public Concourse archetype).</a:t>
+            </a:r>
+          </a:p>
+          <a:p>
+            <a:pPr>
+              <a:spcBef>
+                <a:spcPts val="400"/>
+              </a:spcBef>
+            </a:pPr>
+            <a:r>
+              <a:rPr sz="1000">
+                <a:solidFill>
+                  <a:srgbClr val="1E293B"/>
+                </a:solidFill>
+              </a:rPr>
+              <a:t>• Estimated Density: 442 persons (Critical density level).</a:t>
+            </a:r>
+          </a:p>
+          <a:p>
+            <a:pPr>
+              <a:spcBef>
+                <a:spcPts val="400"/>
+              </a:spcBef>
+            </a:pPr>
+            <a:r>
+              <a:rPr sz="1000">
+                <a:solidFill>
+                  <a:srgbClr val="1E293B"/>
+                </a:solidFill>
+              </a:rPr>
+              <a:t>• Risk Score: 0.88; Optical Turbulence: 0.82.</a:t>
+            </a:r>
+          </a:p>
+          <a:p>
+            <a:pPr>
+              <a:spcBef>
+                <a:spcPts val="400"/>
+              </a:spcBef>
+            </a:pPr>
+            <a:r>
+              <a:rPr sz="1000">
+                <a:solidFill>
+                  <a:srgbClr val="1E293B"/>
+                </a:solidFill>
+              </a:rPr>
+              <a:t>• Directive: Deploy crowd marshals to open secondary relief gates immediately.</a:t>
+            </a:r>
+          </a:p>
+          <a:p>
+            <a:pPr>
+              <a:spcBef>
+                <a:spcPts val="400"/>
+              </a:spcBef>
+            </a:pPr>
+            <a:r>
+              <a:rPr sz="1000">
+                <a:solidFill>
+                  <a:srgbClr val="1E293B"/>
+                </a:solidFill>
+              </a:rPr>
+              <a:t>• Deterministic SHA-256 evidence hash generated.</a:t>
             </a:r>
           </a:p>
         </p:txBody>
